--- a/img/edicion_imagenes.pptx
+++ b/img/edicion_imagenes.pptx
@@ -8,6 +8,13 @@
     <p:sldId id="256" r:id="rId2"/>
     <p:sldId id="257" r:id="rId3"/>
     <p:sldId id="258" r:id="rId4"/>
+    <p:sldId id="259" r:id="rId5"/>
+    <p:sldId id="260" r:id="rId6"/>
+    <p:sldId id="261" r:id="rId7"/>
+    <p:sldId id="262" r:id="rId8"/>
+    <p:sldId id="263" r:id="rId9"/>
+    <p:sldId id="264" r:id="rId10"/>
+    <p:sldId id="265" r:id="rId11"/>
   </p:sldIdLst>
   <p:sldSz cx="12192000" cy="6858000"/>
   <p:notesSz cx="6858000" cy="9144000"/>
@@ -106,6 +113,11 @@
       </a:defRPr>
     </a:lvl9pPr>
   </p:defaultTextStyle>
+  <p:extLst>
+    <p:ext uri="{EFAFB233-063F-42B5-8137-9DF3F51BA10A}">
+      <p15:sldGuideLst xmlns:p15="http://schemas.microsoft.com/office/powerpoint/2012/main"/>
+    </p:ext>
+  </p:extLst>
 </p:presentation>
 </file>
 
@@ -258,7 +270,7 @@
           <a:p>
             <a:fld id="{A73AAFA1-2063-074E-AC94-DC787C9EFE8F}" type="datetimeFigureOut">
               <a:rPr lang="es-ES_tradnl" smtClean="0"/>
-              <a:t>27/7/23</a:t>
+              <a:t>16/09/2025</a:t>
             </a:fld>
             <a:endParaRPr lang="es-ES_tradnl"/>
           </a:p>
@@ -312,7 +324,7 @@
           <a:p>
             <a:fld id="{C2CF2DD4-66F1-6747-B433-65ACEA97F578}" type="slidenum">
               <a:rPr lang="es-ES_tradnl" smtClean="0"/>
-              <a:t>‹#›</a:t>
+              <a:t>‹Nº›</a:t>
             </a:fld>
             <a:endParaRPr lang="es-ES_tradnl"/>
           </a:p>
@@ -458,7 +470,7 @@
           <a:p>
             <a:fld id="{A73AAFA1-2063-074E-AC94-DC787C9EFE8F}" type="datetimeFigureOut">
               <a:rPr lang="es-ES_tradnl" smtClean="0"/>
-              <a:t>27/7/23</a:t>
+              <a:t>16/09/2025</a:t>
             </a:fld>
             <a:endParaRPr lang="es-ES_tradnl"/>
           </a:p>
@@ -512,7 +524,7 @@
           <a:p>
             <a:fld id="{C2CF2DD4-66F1-6747-B433-65ACEA97F578}" type="slidenum">
               <a:rPr lang="es-ES_tradnl" smtClean="0"/>
-              <a:t>‹#›</a:t>
+              <a:t>‹Nº›</a:t>
             </a:fld>
             <a:endParaRPr lang="es-ES_tradnl"/>
           </a:p>
@@ -668,7 +680,7 @@
           <a:p>
             <a:fld id="{A73AAFA1-2063-074E-AC94-DC787C9EFE8F}" type="datetimeFigureOut">
               <a:rPr lang="es-ES_tradnl" smtClean="0"/>
-              <a:t>27/7/23</a:t>
+              <a:t>16/09/2025</a:t>
             </a:fld>
             <a:endParaRPr lang="es-ES_tradnl"/>
           </a:p>
@@ -722,7 +734,7 @@
           <a:p>
             <a:fld id="{C2CF2DD4-66F1-6747-B433-65ACEA97F578}" type="slidenum">
               <a:rPr lang="es-ES_tradnl" smtClean="0"/>
-              <a:t>‹#›</a:t>
+              <a:t>‹Nº›</a:t>
             </a:fld>
             <a:endParaRPr lang="es-ES_tradnl"/>
           </a:p>
@@ -868,7 +880,7 @@
           <a:p>
             <a:fld id="{A73AAFA1-2063-074E-AC94-DC787C9EFE8F}" type="datetimeFigureOut">
               <a:rPr lang="es-ES_tradnl" smtClean="0"/>
-              <a:t>27/7/23</a:t>
+              <a:t>16/09/2025</a:t>
             </a:fld>
             <a:endParaRPr lang="es-ES_tradnl"/>
           </a:p>
@@ -922,7 +934,7 @@
           <a:p>
             <a:fld id="{C2CF2DD4-66F1-6747-B433-65ACEA97F578}" type="slidenum">
               <a:rPr lang="es-ES_tradnl" smtClean="0"/>
-              <a:t>‹#›</a:t>
+              <a:t>‹Nº›</a:t>
             </a:fld>
             <a:endParaRPr lang="es-ES_tradnl"/>
           </a:p>
@@ -1144,7 +1156,7 @@
           <a:p>
             <a:fld id="{A73AAFA1-2063-074E-AC94-DC787C9EFE8F}" type="datetimeFigureOut">
               <a:rPr lang="es-ES_tradnl" smtClean="0"/>
-              <a:t>27/7/23</a:t>
+              <a:t>16/09/2025</a:t>
             </a:fld>
             <a:endParaRPr lang="es-ES_tradnl"/>
           </a:p>
@@ -1198,7 +1210,7 @@
           <a:p>
             <a:fld id="{C2CF2DD4-66F1-6747-B433-65ACEA97F578}" type="slidenum">
               <a:rPr lang="es-ES_tradnl" smtClean="0"/>
-              <a:t>‹#›</a:t>
+              <a:t>‹Nº›</a:t>
             </a:fld>
             <a:endParaRPr lang="es-ES_tradnl"/>
           </a:p>
@@ -1412,7 +1424,7 @@
           <a:p>
             <a:fld id="{A73AAFA1-2063-074E-AC94-DC787C9EFE8F}" type="datetimeFigureOut">
               <a:rPr lang="es-ES_tradnl" smtClean="0"/>
-              <a:t>27/7/23</a:t>
+              <a:t>16/09/2025</a:t>
             </a:fld>
             <a:endParaRPr lang="es-ES_tradnl"/>
           </a:p>
@@ -1466,7 +1478,7 @@
           <a:p>
             <a:fld id="{C2CF2DD4-66F1-6747-B433-65ACEA97F578}" type="slidenum">
               <a:rPr lang="es-ES_tradnl" smtClean="0"/>
-              <a:t>‹#›</a:t>
+              <a:t>‹Nº›</a:t>
             </a:fld>
             <a:endParaRPr lang="es-ES_tradnl"/>
           </a:p>
@@ -1827,7 +1839,7 @@
           <a:p>
             <a:fld id="{A73AAFA1-2063-074E-AC94-DC787C9EFE8F}" type="datetimeFigureOut">
               <a:rPr lang="es-ES_tradnl" smtClean="0"/>
-              <a:t>27/7/23</a:t>
+              <a:t>16/09/2025</a:t>
             </a:fld>
             <a:endParaRPr lang="es-ES_tradnl"/>
           </a:p>
@@ -1881,7 +1893,7 @@
           <a:p>
             <a:fld id="{C2CF2DD4-66F1-6747-B433-65ACEA97F578}" type="slidenum">
               <a:rPr lang="es-ES_tradnl" smtClean="0"/>
-              <a:t>‹#›</a:t>
+              <a:t>‹Nº›</a:t>
             </a:fld>
             <a:endParaRPr lang="es-ES_tradnl"/>
           </a:p>
@@ -1969,7 +1981,7 @@
           <a:p>
             <a:fld id="{A73AAFA1-2063-074E-AC94-DC787C9EFE8F}" type="datetimeFigureOut">
               <a:rPr lang="es-ES_tradnl" smtClean="0"/>
-              <a:t>27/7/23</a:t>
+              <a:t>16/09/2025</a:t>
             </a:fld>
             <a:endParaRPr lang="es-ES_tradnl"/>
           </a:p>
@@ -2023,7 +2035,7 @@
           <a:p>
             <a:fld id="{C2CF2DD4-66F1-6747-B433-65ACEA97F578}" type="slidenum">
               <a:rPr lang="es-ES_tradnl" smtClean="0"/>
-              <a:t>‹#›</a:t>
+              <a:t>‹Nº›</a:t>
             </a:fld>
             <a:endParaRPr lang="es-ES_tradnl"/>
           </a:p>
@@ -2082,7 +2094,7 @@
           <a:p>
             <a:fld id="{A73AAFA1-2063-074E-AC94-DC787C9EFE8F}" type="datetimeFigureOut">
               <a:rPr lang="es-ES_tradnl" smtClean="0"/>
-              <a:t>27/7/23</a:t>
+              <a:t>16/09/2025</a:t>
             </a:fld>
             <a:endParaRPr lang="es-ES_tradnl"/>
           </a:p>
@@ -2136,7 +2148,7 @@
           <a:p>
             <a:fld id="{C2CF2DD4-66F1-6747-B433-65ACEA97F578}" type="slidenum">
               <a:rPr lang="es-ES_tradnl" smtClean="0"/>
-              <a:t>‹#›</a:t>
+              <a:t>‹Nº›</a:t>
             </a:fld>
             <a:endParaRPr lang="es-ES_tradnl"/>
           </a:p>
@@ -2395,7 +2407,7 @@
           <a:p>
             <a:fld id="{A73AAFA1-2063-074E-AC94-DC787C9EFE8F}" type="datetimeFigureOut">
               <a:rPr lang="es-ES_tradnl" smtClean="0"/>
-              <a:t>27/7/23</a:t>
+              <a:t>16/09/2025</a:t>
             </a:fld>
             <a:endParaRPr lang="es-ES_tradnl"/>
           </a:p>
@@ -2449,7 +2461,7 @@
           <a:p>
             <a:fld id="{C2CF2DD4-66F1-6747-B433-65ACEA97F578}" type="slidenum">
               <a:rPr lang="es-ES_tradnl" smtClean="0"/>
-              <a:t>‹#›</a:t>
+              <a:t>‹Nº›</a:t>
             </a:fld>
             <a:endParaRPr lang="es-ES_tradnl"/>
           </a:p>
@@ -2684,7 +2696,7 @@
           <a:p>
             <a:fld id="{A73AAFA1-2063-074E-AC94-DC787C9EFE8F}" type="datetimeFigureOut">
               <a:rPr lang="es-ES_tradnl" smtClean="0"/>
-              <a:t>27/7/23</a:t>
+              <a:t>16/09/2025</a:t>
             </a:fld>
             <a:endParaRPr lang="es-ES_tradnl"/>
           </a:p>
@@ -2738,7 +2750,7 @@
           <a:p>
             <a:fld id="{C2CF2DD4-66F1-6747-B433-65ACEA97F578}" type="slidenum">
               <a:rPr lang="es-ES_tradnl" smtClean="0"/>
-              <a:t>‹#›</a:t>
+              <a:t>‹Nº›</a:t>
             </a:fld>
             <a:endParaRPr lang="es-ES_tradnl"/>
           </a:p>
@@ -2927,7 +2939,7 @@
           <a:p>
             <a:fld id="{A73AAFA1-2063-074E-AC94-DC787C9EFE8F}" type="datetimeFigureOut">
               <a:rPr lang="es-ES_tradnl" smtClean="0"/>
-              <a:t>27/7/23</a:t>
+              <a:t>16/09/2025</a:t>
             </a:fld>
             <a:endParaRPr lang="es-ES_tradnl"/>
           </a:p>
@@ -3017,7 +3029,7 @@
           <a:p>
             <a:fld id="{C2CF2DD4-66F1-6747-B433-65ACEA97F578}" type="slidenum">
               <a:rPr lang="es-ES_tradnl" smtClean="0"/>
-              <a:t>‹#›</a:t>
+              <a:t>‹Nº›</a:t>
             </a:fld>
             <a:endParaRPr lang="es-ES_tradnl"/>
           </a:p>
@@ -3942,6 +3954,191 @@
 </p:sld>
 </file>
 
+<file path=ppt/slides/slide10.xml><?xml version="1.0" encoding="utf-8"?>
+<p:sld xmlns:a="http://schemas.openxmlformats.org/drawingml/2006/main" xmlns:r="http://schemas.openxmlformats.org/officeDocument/2006/relationships" xmlns:p="http://schemas.openxmlformats.org/presentationml/2006/main">
+  <p:cSld>
+    <p:spTree>
+      <p:nvGrpSpPr>
+        <p:cNvPr id="1" name="">
+          <a:extLst>
+            <a:ext uri="{FF2B5EF4-FFF2-40B4-BE49-F238E27FC236}">
+              <a16:creationId xmlns:a16="http://schemas.microsoft.com/office/drawing/2014/main" id="{E77DA390-F29D-5C03-7A70-5892F5C87BB2}"/>
+            </a:ext>
+          </a:extLst>
+        </p:cNvPr>
+        <p:cNvGrpSpPr/>
+        <p:nvPr/>
+      </p:nvGrpSpPr>
+      <p:grpSpPr>
+        <a:xfrm>
+          <a:off x="0" y="0"/>
+          <a:ext cx="0" cy="0"/>
+          <a:chOff x="0" y="0"/>
+          <a:chExt cx="0" cy="0"/>
+        </a:xfrm>
+      </p:grpSpPr>
+      <p:grpSp>
+        <p:nvGrpSpPr>
+          <p:cNvPr id="10" name="Grupo 9">
+            <a:extLst>
+              <a:ext uri="{FF2B5EF4-FFF2-40B4-BE49-F238E27FC236}">
+                <a16:creationId xmlns:a16="http://schemas.microsoft.com/office/drawing/2014/main" id="{EE8DA716-1905-88AD-8365-C95EA53B76B2}"/>
+              </a:ext>
+            </a:extLst>
+          </p:cNvPr>
+          <p:cNvGrpSpPr/>
+          <p:nvPr/>
+        </p:nvGrpSpPr>
+        <p:grpSpPr>
+          <a:xfrm>
+            <a:off x="91972" y="179560"/>
+            <a:ext cx="12430486" cy="5786900"/>
+            <a:chOff x="91972" y="179560"/>
+            <a:chExt cx="12430486" cy="5786900"/>
+          </a:xfrm>
+        </p:grpSpPr>
+        <p:pic>
+          <p:nvPicPr>
+            <p:cNvPr id="4" name="Imagen 3">
+              <a:extLst>
+                <a:ext uri="{FF2B5EF4-FFF2-40B4-BE49-F238E27FC236}">
+                  <a16:creationId xmlns:a16="http://schemas.microsoft.com/office/drawing/2014/main" id="{88A22EE2-D007-0D51-7C15-8ECE086FBDAA}"/>
+                </a:ext>
+              </a:extLst>
+            </p:cNvPr>
+            <p:cNvPicPr>
+              <a:picLocks noChangeAspect="1"/>
+            </p:cNvPicPr>
+            <p:nvPr/>
+          </p:nvPicPr>
+          <p:blipFill>
+            <a:blip r:embed="rId2"/>
+            <a:stretch>
+              <a:fillRect/>
+            </a:stretch>
+          </p:blipFill>
+          <p:spPr>
+            <a:xfrm>
+              <a:off x="91972" y="179561"/>
+              <a:ext cx="3679928" cy="5149566"/>
+            </a:xfrm>
+            <a:prstGeom prst="rect">
+              <a:avLst/>
+            </a:prstGeom>
+          </p:spPr>
+        </p:pic>
+        <p:pic>
+          <p:nvPicPr>
+            <p:cNvPr id="6" name="Imagen 5">
+              <a:extLst>
+                <a:ext uri="{FF2B5EF4-FFF2-40B4-BE49-F238E27FC236}">
+                  <a16:creationId xmlns:a16="http://schemas.microsoft.com/office/drawing/2014/main" id="{AF6BF3C7-FC3D-464D-61B6-C6EB4527307E}"/>
+                </a:ext>
+              </a:extLst>
+            </p:cNvPr>
+            <p:cNvPicPr>
+              <a:picLocks noChangeAspect="1"/>
+            </p:cNvPicPr>
+            <p:nvPr/>
+          </p:nvPicPr>
+          <p:blipFill>
+            <a:blip r:embed="rId3"/>
+            <a:srcRect l="5440" r="4858"/>
+            <a:stretch>
+              <a:fillRect/>
+            </a:stretch>
+          </p:blipFill>
+          <p:spPr>
+            <a:xfrm>
+              <a:off x="3853542" y="179561"/>
+              <a:ext cx="3679928" cy="5786899"/>
+            </a:xfrm>
+            <a:prstGeom prst="rect">
+              <a:avLst/>
+            </a:prstGeom>
+          </p:spPr>
+        </p:pic>
+        <p:sp>
+          <p:nvSpPr>
+            <p:cNvPr id="7" name="CuadroTexto 6">
+              <a:extLst>
+                <a:ext uri="{FF2B5EF4-FFF2-40B4-BE49-F238E27FC236}">
+                  <a16:creationId xmlns:a16="http://schemas.microsoft.com/office/drawing/2014/main" id="{62AC6748-0CED-D5D0-5668-1CF53150F4EB}"/>
+                </a:ext>
+              </a:extLst>
+            </p:cNvPr>
+            <p:cNvSpPr txBox="1"/>
+            <p:nvPr/>
+          </p:nvSpPr>
+          <p:spPr>
+            <a:xfrm>
+              <a:off x="7785737" y="2503170"/>
+              <a:ext cx="1268730" cy="769441"/>
+            </a:xfrm>
+            <a:prstGeom prst="rect">
+              <a:avLst/>
+            </a:prstGeom>
+            <a:noFill/>
+          </p:spPr>
+          <p:txBody>
+            <a:bodyPr wrap="square" rtlCol="0">
+              <a:spAutoFit/>
+            </a:bodyPr>
+            <a:lstStyle/>
+            <a:p>
+              <a:r>
+                <a:rPr lang="es-ES" sz="4400" dirty="0"/>
+                <a:t>…</a:t>
+              </a:r>
+              <a:endParaRPr lang="es-CO" sz="4400" dirty="0"/>
+            </a:p>
+          </p:txBody>
+        </p:sp>
+        <p:pic>
+          <p:nvPicPr>
+            <p:cNvPr id="9" name="Imagen 8">
+              <a:extLst>
+                <a:ext uri="{FF2B5EF4-FFF2-40B4-BE49-F238E27FC236}">
+                  <a16:creationId xmlns:a16="http://schemas.microsoft.com/office/drawing/2014/main" id="{2EEA068B-E3D5-AF8C-2EAC-432F88045DC6}"/>
+                </a:ext>
+              </a:extLst>
+            </p:cNvPr>
+            <p:cNvPicPr>
+              <a:picLocks noChangeAspect="1"/>
+            </p:cNvPicPr>
+            <p:nvPr/>
+          </p:nvPicPr>
+          <p:blipFill>
+            <a:blip r:embed="rId4"/>
+            <a:srcRect l="7109"/>
+            <a:stretch>
+              <a:fillRect/>
+            </a:stretch>
+          </p:blipFill>
+          <p:spPr>
+            <a:xfrm>
+              <a:off x="8420102" y="179560"/>
+              <a:ext cx="4102356" cy="5786899"/>
+            </a:xfrm>
+            <a:prstGeom prst="rect">
+              <a:avLst/>
+            </a:prstGeom>
+          </p:spPr>
+        </p:pic>
+      </p:grpSp>
+    </p:spTree>
+    <p:extLst>
+      <p:ext uri="{BB962C8B-B14F-4D97-AF65-F5344CB8AC3E}">
+        <p14:creationId xmlns:p14="http://schemas.microsoft.com/office/powerpoint/2010/main" val="3371547590"/>
+      </p:ext>
+    </p:extLst>
+  </p:cSld>
+  <p:clrMapOvr>
+    <a:masterClrMapping/>
+  </p:clrMapOvr>
+</p:sld>
+</file>
+
 <file path=ppt/slides/slide2.xml><?xml version="1.0" encoding="utf-8"?>
 <p:sld xmlns:a="http://schemas.openxmlformats.org/drawingml/2006/main" xmlns:r="http://schemas.openxmlformats.org/officeDocument/2006/relationships" xmlns:p="http://schemas.openxmlformats.org/presentationml/2006/main">
   <p:cSld>
@@ -4119,6 +4316,2183 @@
     <p:extLst>
       <p:ext uri="{BB962C8B-B14F-4D97-AF65-F5344CB8AC3E}">
         <p14:creationId xmlns:p14="http://schemas.microsoft.com/office/powerpoint/2010/main" val="2708591023"/>
+      </p:ext>
+    </p:extLst>
+  </p:cSld>
+  <p:clrMapOvr>
+    <a:masterClrMapping/>
+  </p:clrMapOvr>
+</p:sld>
+</file>
+
+<file path=ppt/slides/slide4.xml><?xml version="1.0" encoding="utf-8"?>
+<p:sld xmlns:a="http://schemas.openxmlformats.org/drawingml/2006/main" xmlns:r="http://schemas.openxmlformats.org/officeDocument/2006/relationships" xmlns:p="http://schemas.openxmlformats.org/presentationml/2006/main">
+  <p:cSld>
+    <p:spTree>
+      <p:nvGrpSpPr>
+        <p:cNvPr id="1" name="">
+          <a:extLst>
+            <a:ext uri="{FF2B5EF4-FFF2-40B4-BE49-F238E27FC236}">
+              <a16:creationId xmlns:a16="http://schemas.microsoft.com/office/drawing/2014/main" id="{3677B502-1305-0D37-4535-237036B85F2B}"/>
+            </a:ext>
+          </a:extLst>
+        </p:cNvPr>
+        <p:cNvGrpSpPr/>
+        <p:nvPr/>
+      </p:nvGrpSpPr>
+      <p:grpSpPr>
+        <a:xfrm>
+          <a:off x="0" y="0"/>
+          <a:ext cx="0" cy="0"/>
+          <a:chOff x="0" y="0"/>
+          <a:chExt cx="0" cy="0"/>
+        </a:xfrm>
+      </p:grpSpPr>
+      <p:grpSp>
+        <p:nvGrpSpPr>
+          <p:cNvPr id="25" name="Grupo 24">
+            <a:extLst>
+              <a:ext uri="{FF2B5EF4-FFF2-40B4-BE49-F238E27FC236}">
+                <a16:creationId xmlns:a16="http://schemas.microsoft.com/office/drawing/2014/main" id="{413182A1-5831-B99E-F5BB-96A5D52AF47F}"/>
+              </a:ext>
+            </a:extLst>
+          </p:cNvPr>
+          <p:cNvGrpSpPr/>
+          <p:nvPr/>
+        </p:nvGrpSpPr>
+        <p:grpSpPr>
+          <a:xfrm>
+            <a:off x="1699740" y="115432"/>
+            <a:ext cx="9111271" cy="6342518"/>
+            <a:chOff x="1699740" y="115432"/>
+            <a:chExt cx="9111271" cy="6342518"/>
+          </a:xfrm>
+        </p:grpSpPr>
+        <p:pic>
+          <p:nvPicPr>
+            <p:cNvPr id="3" name="Imagen 2">
+              <a:extLst>
+                <a:ext uri="{FF2B5EF4-FFF2-40B4-BE49-F238E27FC236}">
+                  <a16:creationId xmlns:a16="http://schemas.microsoft.com/office/drawing/2014/main" id="{83C36303-4307-0D8B-3641-CE11A1D11056}"/>
+                </a:ext>
+              </a:extLst>
+            </p:cNvPr>
+            <p:cNvPicPr>
+              <a:picLocks noChangeAspect="1"/>
+            </p:cNvPicPr>
+            <p:nvPr/>
+          </p:nvPicPr>
+          <p:blipFill>
+            <a:blip r:embed="rId2"/>
+            <a:stretch>
+              <a:fillRect/>
+            </a:stretch>
+          </p:blipFill>
+          <p:spPr>
+            <a:xfrm>
+              <a:off x="2703811" y="115432"/>
+              <a:ext cx="7103129" cy="6342518"/>
+            </a:xfrm>
+            <a:prstGeom prst="rect">
+              <a:avLst/>
+            </a:prstGeom>
+          </p:spPr>
+        </p:pic>
+        <p:sp>
+          <p:nvSpPr>
+            <p:cNvPr id="4" name="Elipse 3">
+              <a:extLst>
+                <a:ext uri="{FF2B5EF4-FFF2-40B4-BE49-F238E27FC236}">
+                  <a16:creationId xmlns:a16="http://schemas.microsoft.com/office/drawing/2014/main" id="{D8BB1382-62B6-D306-3360-F573DE70B06F}"/>
+                </a:ext>
+              </a:extLst>
+            </p:cNvPr>
+            <p:cNvSpPr/>
+            <p:nvPr/>
+          </p:nvSpPr>
+          <p:spPr>
+            <a:xfrm>
+              <a:off x="1699740" y="1856876"/>
+              <a:ext cx="481786" cy="459825"/>
+            </a:xfrm>
+            <a:prstGeom prst="ellipse">
+              <a:avLst/>
+            </a:prstGeom>
+            <a:solidFill>
+              <a:schemeClr val="accent5">
+                <a:lumMod val="75000"/>
+              </a:schemeClr>
+            </a:solidFill>
+            <a:ln>
+              <a:solidFill>
+                <a:schemeClr val="accent5">
+                  <a:lumMod val="75000"/>
+                </a:schemeClr>
+              </a:solidFill>
+            </a:ln>
+          </p:spPr>
+          <p:style>
+            <a:lnRef idx="2">
+              <a:schemeClr val="accent1">
+                <a:shade val="15000"/>
+              </a:schemeClr>
+            </a:lnRef>
+            <a:fillRef idx="1">
+              <a:schemeClr val="accent1"/>
+            </a:fillRef>
+            <a:effectRef idx="0">
+              <a:schemeClr val="accent1"/>
+            </a:effectRef>
+            <a:fontRef idx="minor">
+              <a:schemeClr val="lt1"/>
+            </a:fontRef>
+          </p:style>
+          <p:txBody>
+            <a:bodyPr rtlCol="0" anchor="ctr"/>
+            <a:lstStyle/>
+            <a:p>
+              <a:pPr algn="ctr"/>
+              <a:r>
+                <a:rPr lang="es-ES" b="1" dirty="0">
+                  <a:latin typeface="Aptos Light" panose="020F0502020204030204" pitchFamily="34" charset="0"/>
+                </a:rPr>
+                <a:t>3</a:t>
+              </a:r>
+              <a:endParaRPr lang="es-CO" b="1" dirty="0">
+                <a:latin typeface="Aptos Light" panose="020F0502020204030204" pitchFamily="34" charset="0"/>
+              </a:endParaRPr>
+            </a:p>
+          </p:txBody>
+        </p:sp>
+        <p:sp>
+          <p:nvSpPr>
+            <p:cNvPr id="5" name="Elipse 4">
+              <a:extLst>
+                <a:ext uri="{FF2B5EF4-FFF2-40B4-BE49-F238E27FC236}">
+                  <a16:creationId xmlns:a16="http://schemas.microsoft.com/office/drawing/2014/main" id="{C3E52046-C2AF-83C0-24A0-400B962502FD}"/>
+                </a:ext>
+              </a:extLst>
+            </p:cNvPr>
+            <p:cNvSpPr/>
+            <p:nvPr/>
+          </p:nvSpPr>
+          <p:spPr>
+            <a:xfrm>
+              <a:off x="10329225" y="845759"/>
+              <a:ext cx="481786" cy="459825"/>
+            </a:xfrm>
+            <a:prstGeom prst="ellipse">
+              <a:avLst/>
+            </a:prstGeom>
+            <a:solidFill>
+              <a:schemeClr val="accent5">
+                <a:lumMod val="75000"/>
+              </a:schemeClr>
+            </a:solidFill>
+            <a:ln>
+              <a:solidFill>
+                <a:schemeClr val="accent5">
+                  <a:lumMod val="75000"/>
+                </a:schemeClr>
+              </a:solidFill>
+            </a:ln>
+          </p:spPr>
+          <p:style>
+            <a:lnRef idx="2">
+              <a:schemeClr val="accent1">
+                <a:shade val="15000"/>
+              </a:schemeClr>
+            </a:lnRef>
+            <a:fillRef idx="1">
+              <a:schemeClr val="accent1"/>
+            </a:fillRef>
+            <a:effectRef idx="0">
+              <a:schemeClr val="accent1"/>
+            </a:effectRef>
+            <a:fontRef idx="minor">
+              <a:schemeClr val="lt1"/>
+            </a:fontRef>
+          </p:style>
+          <p:txBody>
+            <a:bodyPr rtlCol="0" anchor="ctr"/>
+            <a:lstStyle/>
+            <a:p>
+              <a:pPr algn="ctr"/>
+              <a:r>
+                <a:rPr lang="es-ES" b="1" dirty="0">
+                  <a:latin typeface="Aptos Light" panose="020F0502020204030204" pitchFamily="34" charset="0"/>
+                </a:rPr>
+                <a:t>4</a:t>
+              </a:r>
+              <a:endParaRPr lang="es-CO" b="1" dirty="0">
+                <a:latin typeface="Aptos Light" panose="020F0502020204030204" pitchFamily="34" charset="0"/>
+              </a:endParaRPr>
+            </a:p>
+          </p:txBody>
+        </p:sp>
+        <p:sp>
+          <p:nvSpPr>
+            <p:cNvPr id="6" name="Elipse 5">
+              <a:extLst>
+                <a:ext uri="{FF2B5EF4-FFF2-40B4-BE49-F238E27FC236}">
+                  <a16:creationId xmlns:a16="http://schemas.microsoft.com/office/drawing/2014/main" id="{CF738A90-E42E-E401-6CA8-D0860AD13ADB}"/>
+                </a:ext>
+              </a:extLst>
+            </p:cNvPr>
+            <p:cNvSpPr/>
+            <p:nvPr/>
+          </p:nvSpPr>
+          <p:spPr>
+            <a:xfrm>
+              <a:off x="4146637" y="4541300"/>
+              <a:ext cx="481786" cy="459825"/>
+            </a:xfrm>
+            <a:prstGeom prst="ellipse">
+              <a:avLst/>
+            </a:prstGeom>
+            <a:solidFill>
+              <a:schemeClr val="accent5">
+                <a:lumMod val="75000"/>
+              </a:schemeClr>
+            </a:solidFill>
+            <a:ln>
+              <a:solidFill>
+                <a:schemeClr val="accent5">
+                  <a:lumMod val="75000"/>
+                </a:schemeClr>
+              </a:solidFill>
+            </a:ln>
+          </p:spPr>
+          <p:style>
+            <a:lnRef idx="2">
+              <a:schemeClr val="accent1">
+                <a:shade val="15000"/>
+              </a:schemeClr>
+            </a:lnRef>
+            <a:fillRef idx="1">
+              <a:schemeClr val="accent1"/>
+            </a:fillRef>
+            <a:effectRef idx="0">
+              <a:schemeClr val="accent1"/>
+            </a:effectRef>
+            <a:fontRef idx="minor">
+              <a:schemeClr val="lt1"/>
+            </a:fontRef>
+          </p:style>
+          <p:txBody>
+            <a:bodyPr rtlCol="0" anchor="ctr"/>
+            <a:lstStyle/>
+            <a:p>
+              <a:pPr algn="ctr"/>
+              <a:r>
+                <a:rPr lang="es-ES" b="1" dirty="0">
+                  <a:latin typeface="Aptos Light" panose="020F0502020204030204" pitchFamily="34" charset="0"/>
+                </a:rPr>
+                <a:t>6</a:t>
+              </a:r>
+              <a:endParaRPr lang="es-CO" b="1" dirty="0">
+                <a:latin typeface="Aptos Light" panose="020F0502020204030204" pitchFamily="34" charset="0"/>
+              </a:endParaRPr>
+            </a:p>
+          </p:txBody>
+        </p:sp>
+        <p:sp>
+          <p:nvSpPr>
+            <p:cNvPr id="7" name="Elipse 6">
+              <a:extLst>
+                <a:ext uri="{FF2B5EF4-FFF2-40B4-BE49-F238E27FC236}">
+                  <a16:creationId xmlns:a16="http://schemas.microsoft.com/office/drawing/2014/main" id="{F5AC3C0F-B026-8E6A-63F4-A2E02CEA1AE4}"/>
+                </a:ext>
+              </a:extLst>
+            </p:cNvPr>
+            <p:cNvSpPr/>
+            <p:nvPr/>
+          </p:nvSpPr>
+          <p:spPr>
+            <a:xfrm>
+              <a:off x="10088332" y="3853066"/>
+              <a:ext cx="481786" cy="459825"/>
+            </a:xfrm>
+            <a:prstGeom prst="ellipse">
+              <a:avLst/>
+            </a:prstGeom>
+            <a:solidFill>
+              <a:schemeClr val="accent5">
+                <a:lumMod val="75000"/>
+              </a:schemeClr>
+            </a:solidFill>
+            <a:ln>
+              <a:solidFill>
+                <a:schemeClr val="accent5">
+                  <a:lumMod val="75000"/>
+                </a:schemeClr>
+              </a:solidFill>
+            </a:ln>
+          </p:spPr>
+          <p:style>
+            <a:lnRef idx="2">
+              <a:schemeClr val="accent1">
+                <a:shade val="15000"/>
+              </a:schemeClr>
+            </a:lnRef>
+            <a:fillRef idx="1">
+              <a:schemeClr val="accent1"/>
+            </a:fillRef>
+            <a:effectRef idx="0">
+              <a:schemeClr val="accent1"/>
+            </a:effectRef>
+            <a:fontRef idx="minor">
+              <a:schemeClr val="lt1"/>
+            </a:fontRef>
+          </p:style>
+          <p:txBody>
+            <a:bodyPr rtlCol="0" anchor="ctr"/>
+            <a:lstStyle/>
+            <a:p>
+              <a:pPr algn="ctr"/>
+              <a:r>
+                <a:rPr lang="es-ES" b="1" dirty="0">
+                  <a:latin typeface="Aptos Light" panose="020F0502020204030204" pitchFamily="34" charset="0"/>
+                </a:rPr>
+                <a:t>5</a:t>
+              </a:r>
+              <a:endParaRPr lang="es-CO" b="1" dirty="0">
+                <a:latin typeface="Aptos Light" panose="020F0502020204030204" pitchFamily="34" charset="0"/>
+              </a:endParaRPr>
+            </a:p>
+          </p:txBody>
+        </p:sp>
+        <p:sp>
+          <p:nvSpPr>
+            <p:cNvPr id="8" name="Elipse 7">
+              <a:extLst>
+                <a:ext uri="{FF2B5EF4-FFF2-40B4-BE49-F238E27FC236}">
+                  <a16:creationId xmlns:a16="http://schemas.microsoft.com/office/drawing/2014/main" id="{25AE8BE6-9662-CBBD-EE33-286A69F9E6F0}"/>
+                </a:ext>
+              </a:extLst>
+            </p:cNvPr>
+            <p:cNvSpPr/>
+            <p:nvPr/>
+          </p:nvSpPr>
+          <p:spPr>
+            <a:xfrm>
+              <a:off x="5855107" y="5986290"/>
+              <a:ext cx="481786" cy="459825"/>
+            </a:xfrm>
+            <a:prstGeom prst="ellipse">
+              <a:avLst/>
+            </a:prstGeom>
+            <a:solidFill>
+              <a:schemeClr val="accent5">
+                <a:lumMod val="75000"/>
+              </a:schemeClr>
+            </a:solidFill>
+            <a:ln>
+              <a:solidFill>
+                <a:schemeClr val="accent5">
+                  <a:lumMod val="75000"/>
+                </a:schemeClr>
+              </a:solidFill>
+            </a:ln>
+          </p:spPr>
+          <p:style>
+            <a:lnRef idx="2">
+              <a:schemeClr val="accent1">
+                <a:shade val="15000"/>
+              </a:schemeClr>
+            </a:lnRef>
+            <a:fillRef idx="1">
+              <a:schemeClr val="accent1"/>
+            </a:fillRef>
+            <a:effectRef idx="0">
+              <a:schemeClr val="accent1"/>
+            </a:effectRef>
+            <a:fontRef idx="minor">
+              <a:schemeClr val="lt1"/>
+            </a:fontRef>
+          </p:style>
+          <p:txBody>
+            <a:bodyPr rtlCol="0" anchor="ctr"/>
+            <a:lstStyle/>
+            <a:p>
+              <a:pPr algn="ctr"/>
+              <a:r>
+                <a:rPr lang="es-ES" b="1" dirty="0">
+                  <a:latin typeface="Aptos Light" panose="020F0502020204030204" pitchFamily="34" charset="0"/>
+                </a:rPr>
+                <a:t>7</a:t>
+              </a:r>
+              <a:endParaRPr lang="es-CO" b="1" dirty="0">
+                <a:latin typeface="Aptos Light" panose="020F0502020204030204" pitchFamily="34" charset="0"/>
+              </a:endParaRPr>
+            </a:p>
+          </p:txBody>
+        </p:sp>
+        <p:sp>
+          <p:nvSpPr>
+            <p:cNvPr id="9" name="Rectángulo: esquinas redondeadas 8">
+              <a:extLst>
+                <a:ext uri="{FF2B5EF4-FFF2-40B4-BE49-F238E27FC236}">
+                  <a16:creationId xmlns:a16="http://schemas.microsoft.com/office/drawing/2014/main" id="{9D6F72FF-F20A-F144-02D3-9AAE4C636BCE}"/>
+                </a:ext>
+              </a:extLst>
+            </p:cNvPr>
+            <p:cNvSpPr/>
+            <p:nvPr/>
+          </p:nvSpPr>
+          <p:spPr>
+            <a:xfrm>
+              <a:off x="2703811" y="1856876"/>
+              <a:ext cx="2063061" cy="459825"/>
+            </a:xfrm>
+            <a:prstGeom prst="roundRect">
+              <a:avLst/>
+            </a:prstGeom>
+            <a:noFill/>
+            <a:ln w="28575">
+              <a:solidFill>
+                <a:schemeClr val="accent5">
+                  <a:lumMod val="75000"/>
+                </a:schemeClr>
+              </a:solidFill>
+            </a:ln>
+          </p:spPr>
+          <p:style>
+            <a:lnRef idx="2">
+              <a:schemeClr val="accent1">
+                <a:shade val="15000"/>
+              </a:schemeClr>
+            </a:lnRef>
+            <a:fillRef idx="1">
+              <a:schemeClr val="accent1"/>
+            </a:fillRef>
+            <a:effectRef idx="0">
+              <a:schemeClr val="accent1"/>
+            </a:effectRef>
+            <a:fontRef idx="minor">
+              <a:schemeClr val="lt1"/>
+            </a:fontRef>
+          </p:style>
+          <p:txBody>
+            <a:bodyPr rtlCol="0" anchor="ctr"/>
+            <a:lstStyle/>
+            <a:p>
+              <a:pPr algn="ctr"/>
+              <a:endParaRPr lang="es-CO" dirty="0"/>
+            </a:p>
+          </p:txBody>
+        </p:sp>
+        <p:sp>
+          <p:nvSpPr>
+            <p:cNvPr id="10" name="Rectángulo: esquinas redondeadas 9">
+              <a:extLst>
+                <a:ext uri="{FF2B5EF4-FFF2-40B4-BE49-F238E27FC236}">
+                  <a16:creationId xmlns:a16="http://schemas.microsoft.com/office/drawing/2014/main" id="{4CC3AE8A-FD85-E46E-CCE3-496FBCEAA81E}"/>
+                </a:ext>
+              </a:extLst>
+            </p:cNvPr>
+            <p:cNvSpPr/>
+            <p:nvPr/>
+          </p:nvSpPr>
+          <p:spPr>
+            <a:xfrm>
+              <a:off x="5064469" y="884420"/>
+              <a:ext cx="4289393" cy="337998"/>
+            </a:xfrm>
+            <a:prstGeom prst="roundRect">
+              <a:avLst/>
+            </a:prstGeom>
+            <a:noFill/>
+            <a:ln w="28575">
+              <a:solidFill>
+                <a:schemeClr val="accent5">
+                  <a:lumMod val="75000"/>
+                </a:schemeClr>
+              </a:solidFill>
+            </a:ln>
+          </p:spPr>
+          <p:style>
+            <a:lnRef idx="2">
+              <a:schemeClr val="accent1">
+                <a:shade val="15000"/>
+              </a:schemeClr>
+            </a:lnRef>
+            <a:fillRef idx="1">
+              <a:schemeClr val="accent1"/>
+            </a:fillRef>
+            <a:effectRef idx="0">
+              <a:schemeClr val="accent1"/>
+            </a:effectRef>
+            <a:fontRef idx="minor">
+              <a:schemeClr val="lt1"/>
+            </a:fontRef>
+          </p:style>
+          <p:txBody>
+            <a:bodyPr rtlCol="0" anchor="ctr"/>
+            <a:lstStyle/>
+            <a:p>
+              <a:pPr algn="ctr"/>
+              <a:endParaRPr lang="es-CO" dirty="0"/>
+            </a:p>
+          </p:txBody>
+        </p:sp>
+        <p:sp>
+          <p:nvSpPr>
+            <p:cNvPr id="11" name="Rectángulo: esquinas redondeadas 10">
+              <a:extLst>
+                <a:ext uri="{FF2B5EF4-FFF2-40B4-BE49-F238E27FC236}">
+                  <a16:creationId xmlns:a16="http://schemas.microsoft.com/office/drawing/2014/main" id="{E23AB526-EE9A-3F48-13AB-AA6D6F3A9917}"/>
+                </a:ext>
+              </a:extLst>
+            </p:cNvPr>
+            <p:cNvSpPr/>
+            <p:nvPr/>
+          </p:nvSpPr>
+          <p:spPr>
+            <a:xfrm>
+              <a:off x="5064469" y="3974892"/>
+              <a:ext cx="4559216" cy="337998"/>
+            </a:xfrm>
+            <a:prstGeom prst="roundRect">
+              <a:avLst/>
+            </a:prstGeom>
+            <a:noFill/>
+            <a:ln w="28575">
+              <a:solidFill>
+                <a:schemeClr val="accent5">
+                  <a:lumMod val="75000"/>
+                </a:schemeClr>
+              </a:solidFill>
+            </a:ln>
+          </p:spPr>
+          <p:style>
+            <a:lnRef idx="2">
+              <a:schemeClr val="accent1">
+                <a:shade val="15000"/>
+              </a:schemeClr>
+            </a:lnRef>
+            <a:fillRef idx="1">
+              <a:schemeClr val="accent1"/>
+            </a:fillRef>
+            <a:effectRef idx="0">
+              <a:schemeClr val="accent1"/>
+            </a:effectRef>
+            <a:fontRef idx="minor">
+              <a:schemeClr val="lt1"/>
+            </a:fontRef>
+          </p:style>
+          <p:txBody>
+            <a:bodyPr rtlCol="0" anchor="ctr"/>
+            <a:lstStyle/>
+            <a:p>
+              <a:pPr algn="ctr"/>
+              <a:endParaRPr lang="es-CO" dirty="0"/>
+            </a:p>
+          </p:txBody>
+        </p:sp>
+        <p:sp>
+          <p:nvSpPr>
+            <p:cNvPr id="12" name="Rectángulo: esquinas redondeadas 11">
+              <a:extLst>
+                <a:ext uri="{FF2B5EF4-FFF2-40B4-BE49-F238E27FC236}">
+                  <a16:creationId xmlns:a16="http://schemas.microsoft.com/office/drawing/2014/main" id="{B16DDD33-56A2-BE2B-B4E6-7DF2717CDAC0}"/>
+                </a:ext>
+              </a:extLst>
+            </p:cNvPr>
+            <p:cNvSpPr/>
+            <p:nvPr/>
+          </p:nvSpPr>
+          <p:spPr>
+            <a:xfrm>
+              <a:off x="7480091" y="6006495"/>
+              <a:ext cx="1049311" cy="439620"/>
+            </a:xfrm>
+            <a:prstGeom prst="roundRect">
+              <a:avLst/>
+            </a:prstGeom>
+            <a:noFill/>
+            <a:ln w="28575">
+              <a:solidFill>
+                <a:schemeClr val="accent5">
+                  <a:lumMod val="75000"/>
+                </a:schemeClr>
+              </a:solidFill>
+            </a:ln>
+          </p:spPr>
+          <p:style>
+            <a:lnRef idx="2">
+              <a:schemeClr val="accent1">
+                <a:shade val="15000"/>
+              </a:schemeClr>
+            </a:lnRef>
+            <a:fillRef idx="1">
+              <a:schemeClr val="accent1"/>
+            </a:fillRef>
+            <a:effectRef idx="0">
+              <a:schemeClr val="accent1"/>
+            </a:effectRef>
+            <a:fontRef idx="minor">
+              <a:schemeClr val="lt1"/>
+            </a:fontRef>
+          </p:style>
+          <p:txBody>
+            <a:bodyPr rtlCol="0" anchor="ctr"/>
+            <a:lstStyle/>
+            <a:p>
+              <a:pPr algn="ctr"/>
+              <a:endParaRPr lang="es-CO" dirty="0"/>
+            </a:p>
+          </p:txBody>
+        </p:sp>
+        <p:cxnSp>
+          <p:nvCxnSpPr>
+            <p:cNvPr id="13" name="Conector recto de flecha 12">
+              <a:extLst>
+                <a:ext uri="{FF2B5EF4-FFF2-40B4-BE49-F238E27FC236}">
+                  <a16:creationId xmlns:a16="http://schemas.microsoft.com/office/drawing/2014/main" id="{0829A08D-EFB2-CEBB-7181-8DBB81E10E30}"/>
+                </a:ext>
+              </a:extLst>
+            </p:cNvPr>
+            <p:cNvCxnSpPr>
+              <a:cxnSpLocks/>
+            </p:cNvCxnSpPr>
+            <p:nvPr/>
+          </p:nvCxnSpPr>
+          <p:spPr>
+            <a:xfrm>
+              <a:off x="2087718" y="2086788"/>
+              <a:ext cx="616093" cy="1"/>
+            </a:xfrm>
+            <a:prstGeom prst="straightConnector1">
+              <a:avLst/>
+            </a:prstGeom>
+            <a:ln w="38100">
+              <a:solidFill>
+                <a:schemeClr val="accent5">
+                  <a:lumMod val="75000"/>
+                </a:schemeClr>
+              </a:solidFill>
+              <a:tailEnd type="triangle"/>
+            </a:ln>
+          </p:spPr>
+          <p:style>
+            <a:lnRef idx="1">
+              <a:schemeClr val="accent1"/>
+            </a:lnRef>
+            <a:fillRef idx="0">
+              <a:schemeClr val="accent1"/>
+            </a:fillRef>
+            <a:effectRef idx="0">
+              <a:schemeClr val="accent1"/>
+            </a:effectRef>
+            <a:fontRef idx="minor">
+              <a:schemeClr val="tx1"/>
+            </a:fontRef>
+          </p:style>
+        </p:cxnSp>
+        <p:cxnSp>
+          <p:nvCxnSpPr>
+            <p:cNvPr id="14" name="Conector recto de flecha 13">
+              <a:extLst>
+                <a:ext uri="{FF2B5EF4-FFF2-40B4-BE49-F238E27FC236}">
+                  <a16:creationId xmlns:a16="http://schemas.microsoft.com/office/drawing/2014/main" id="{F2DD3802-F71A-3913-3BC9-0E70BA0CEEE2}"/>
+                </a:ext>
+              </a:extLst>
+            </p:cNvPr>
+            <p:cNvCxnSpPr>
+              <a:cxnSpLocks/>
+            </p:cNvCxnSpPr>
+            <p:nvPr/>
+          </p:nvCxnSpPr>
+          <p:spPr>
+            <a:xfrm>
+              <a:off x="4515530" y="4803457"/>
+              <a:ext cx="616093" cy="1"/>
+            </a:xfrm>
+            <a:prstGeom prst="straightConnector1">
+              <a:avLst/>
+            </a:prstGeom>
+            <a:ln w="38100">
+              <a:solidFill>
+                <a:schemeClr val="accent5">
+                  <a:lumMod val="75000"/>
+                </a:schemeClr>
+              </a:solidFill>
+              <a:tailEnd type="triangle"/>
+            </a:ln>
+          </p:spPr>
+          <p:style>
+            <a:lnRef idx="1">
+              <a:schemeClr val="accent1"/>
+            </a:lnRef>
+            <a:fillRef idx="0">
+              <a:schemeClr val="accent1"/>
+            </a:fillRef>
+            <a:effectRef idx="0">
+              <a:schemeClr val="accent1"/>
+            </a:effectRef>
+            <a:fontRef idx="minor">
+              <a:schemeClr val="tx1"/>
+            </a:fontRef>
+          </p:style>
+        </p:cxnSp>
+        <p:cxnSp>
+          <p:nvCxnSpPr>
+            <p:cNvPr id="15" name="Conector recto de flecha 14">
+              <a:extLst>
+                <a:ext uri="{FF2B5EF4-FFF2-40B4-BE49-F238E27FC236}">
+                  <a16:creationId xmlns:a16="http://schemas.microsoft.com/office/drawing/2014/main" id="{DDE640F0-65CC-F0CB-C2D5-19741D5F957E}"/>
+                </a:ext>
+              </a:extLst>
+            </p:cNvPr>
+            <p:cNvCxnSpPr>
+              <a:cxnSpLocks/>
+              <a:stCxn id="8" idx="6"/>
+            </p:cNvCxnSpPr>
+            <p:nvPr/>
+          </p:nvCxnSpPr>
+          <p:spPr>
+            <a:xfrm>
+              <a:off x="6336893" y="6216203"/>
+              <a:ext cx="1143198" cy="10102"/>
+            </a:xfrm>
+            <a:prstGeom prst="straightConnector1">
+              <a:avLst/>
+            </a:prstGeom>
+            <a:ln w="38100">
+              <a:solidFill>
+                <a:schemeClr val="accent5">
+                  <a:lumMod val="75000"/>
+                </a:schemeClr>
+              </a:solidFill>
+              <a:tailEnd type="triangle"/>
+            </a:ln>
+          </p:spPr>
+          <p:style>
+            <a:lnRef idx="1">
+              <a:schemeClr val="accent1"/>
+            </a:lnRef>
+            <a:fillRef idx="0">
+              <a:schemeClr val="accent1"/>
+            </a:fillRef>
+            <a:effectRef idx="0">
+              <a:schemeClr val="accent1"/>
+            </a:effectRef>
+            <a:fontRef idx="minor">
+              <a:schemeClr val="tx1"/>
+            </a:fontRef>
+          </p:style>
+        </p:cxnSp>
+        <p:cxnSp>
+          <p:nvCxnSpPr>
+            <p:cNvPr id="18" name="Conector recto de flecha 17">
+              <a:extLst>
+                <a:ext uri="{FF2B5EF4-FFF2-40B4-BE49-F238E27FC236}">
+                  <a16:creationId xmlns:a16="http://schemas.microsoft.com/office/drawing/2014/main" id="{C53D5C16-E8C8-C63B-3FFA-2DA2B08D7CA4}"/>
+                </a:ext>
+              </a:extLst>
+            </p:cNvPr>
+            <p:cNvCxnSpPr>
+              <a:cxnSpLocks/>
+              <a:stCxn id="5" idx="2"/>
+            </p:cNvCxnSpPr>
+            <p:nvPr/>
+          </p:nvCxnSpPr>
+          <p:spPr>
+            <a:xfrm flipH="1">
+              <a:off x="9353862" y="1075672"/>
+              <a:ext cx="975363" cy="0"/>
+            </a:xfrm>
+            <a:prstGeom prst="straightConnector1">
+              <a:avLst/>
+            </a:prstGeom>
+            <a:ln w="38100">
+              <a:solidFill>
+                <a:schemeClr val="accent5">
+                  <a:lumMod val="75000"/>
+                </a:schemeClr>
+              </a:solidFill>
+              <a:tailEnd type="triangle"/>
+            </a:ln>
+          </p:spPr>
+          <p:style>
+            <a:lnRef idx="1">
+              <a:schemeClr val="accent1"/>
+            </a:lnRef>
+            <a:fillRef idx="0">
+              <a:schemeClr val="accent1"/>
+            </a:fillRef>
+            <a:effectRef idx="0">
+              <a:schemeClr val="accent1"/>
+            </a:effectRef>
+            <a:fontRef idx="minor">
+              <a:schemeClr val="tx1"/>
+            </a:fontRef>
+          </p:style>
+        </p:cxnSp>
+        <p:cxnSp>
+          <p:nvCxnSpPr>
+            <p:cNvPr id="23" name="Conector recto de flecha 22">
+              <a:extLst>
+                <a:ext uri="{FF2B5EF4-FFF2-40B4-BE49-F238E27FC236}">
+                  <a16:creationId xmlns:a16="http://schemas.microsoft.com/office/drawing/2014/main" id="{7CD4B243-AB38-FF78-7F84-0FF0F6488FD1}"/>
+                </a:ext>
+              </a:extLst>
+            </p:cNvPr>
+            <p:cNvCxnSpPr>
+              <a:cxnSpLocks/>
+              <a:stCxn id="7" idx="2"/>
+            </p:cNvCxnSpPr>
+            <p:nvPr/>
+          </p:nvCxnSpPr>
+          <p:spPr>
+            <a:xfrm flipH="1" flipV="1">
+              <a:off x="9600650" y="4082808"/>
+              <a:ext cx="487682" cy="171"/>
+            </a:xfrm>
+            <a:prstGeom prst="straightConnector1">
+              <a:avLst/>
+            </a:prstGeom>
+            <a:ln w="38100">
+              <a:solidFill>
+                <a:schemeClr val="accent5">
+                  <a:lumMod val="75000"/>
+                </a:schemeClr>
+              </a:solidFill>
+              <a:tailEnd type="triangle"/>
+            </a:ln>
+          </p:spPr>
+          <p:style>
+            <a:lnRef idx="1">
+              <a:schemeClr val="accent1"/>
+            </a:lnRef>
+            <a:fillRef idx="0">
+              <a:schemeClr val="accent1"/>
+            </a:fillRef>
+            <a:effectRef idx="0">
+              <a:schemeClr val="accent1"/>
+            </a:effectRef>
+            <a:fontRef idx="minor">
+              <a:schemeClr val="tx1"/>
+            </a:fontRef>
+          </p:style>
+        </p:cxnSp>
+      </p:grpSp>
+    </p:spTree>
+    <p:extLst>
+      <p:ext uri="{BB962C8B-B14F-4D97-AF65-F5344CB8AC3E}">
+        <p14:creationId xmlns:p14="http://schemas.microsoft.com/office/powerpoint/2010/main" val="2717966445"/>
+      </p:ext>
+    </p:extLst>
+  </p:cSld>
+  <p:clrMapOvr>
+    <a:masterClrMapping/>
+  </p:clrMapOvr>
+</p:sld>
+</file>
+
+<file path=ppt/slides/slide5.xml><?xml version="1.0" encoding="utf-8"?>
+<p:sld xmlns:a="http://schemas.openxmlformats.org/drawingml/2006/main" xmlns:r="http://schemas.openxmlformats.org/officeDocument/2006/relationships" xmlns:p="http://schemas.openxmlformats.org/presentationml/2006/main">
+  <p:cSld>
+    <p:spTree>
+      <p:nvGrpSpPr>
+        <p:cNvPr id="1" name="">
+          <a:extLst>
+            <a:ext uri="{FF2B5EF4-FFF2-40B4-BE49-F238E27FC236}">
+              <a16:creationId xmlns:a16="http://schemas.microsoft.com/office/drawing/2014/main" id="{45B7FC84-EF5B-7803-B774-2240F065FA00}"/>
+            </a:ext>
+          </a:extLst>
+        </p:cNvPr>
+        <p:cNvGrpSpPr/>
+        <p:nvPr/>
+      </p:nvGrpSpPr>
+      <p:grpSpPr>
+        <a:xfrm>
+          <a:off x="0" y="0"/>
+          <a:ext cx="0" cy="0"/>
+          <a:chOff x="0" y="0"/>
+          <a:chExt cx="0" cy="0"/>
+        </a:xfrm>
+      </p:grpSpPr>
+      <p:pic>
+        <p:nvPicPr>
+          <p:cNvPr id="4" name="Imagen 3">
+            <a:extLst>
+              <a:ext uri="{FF2B5EF4-FFF2-40B4-BE49-F238E27FC236}">
+                <a16:creationId xmlns:a16="http://schemas.microsoft.com/office/drawing/2014/main" id="{3DDFBF2B-6136-3900-062B-9A9384D14EC7}"/>
+              </a:ext>
+            </a:extLst>
+          </p:cNvPr>
+          <p:cNvPicPr>
+            <a:picLocks noChangeAspect="1"/>
+          </p:cNvPicPr>
+          <p:nvPr/>
+        </p:nvPicPr>
+        <p:blipFill>
+          <a:blip r:embed="rId2"/>
+          <a:stretch>
+            <a:fillRect/>
+          </a:stretch>
+        </p:blipFill>
+        <p:spPr>
+          <a:xfrm>
+            <a:off x="1255330" y="294718"/>
+            <a:ext cx="9659126" cy="6432653"/>
+          </a:xfrm>
+          <a:prstGeom prst="rect">
+            <a:avLst/>
+          </a:prstGeom>
+        </p:spPr>
+      </p:pic>
+    </p:spTree>
+    <p:extLst>
+      <p:ext uri="{BB962C8B-B14F-4D97-AF65-F5344CB8AC3E}">
+        <p14:creationId xmlns:p14="http://schemas.microsoft.com/office/powerpoint/2010/main" val="1182681739"/>
+      </p:ext>
+    </p:extLst>
+  </p:cSld>
+  <p:clrMapOvr>
+    <a:masterClrMapping/>
+  </p:clrMapOvr>
+</p:sld>
+</file>
+
+<file path=ppt/slides/slide6.xml><?xml version="1.0" encoding="utf-8"?>
+<p:sld xmlns:a="http://schemas.openxmlformats.org/drawingml/2006/main" xmlns:r="http://schemas.openxmlformats.org/officeDocument/2006/relationships" xmlns:p="http://schemas.openxmlformats.org/presentationml/2006/main">
+  <p:cSld>
+    <p:spTree>
+      <p:nvGrpSpPr>
+        <p:cNvPr id="1" name="">
+          <a:extLst>
+            <a:ext uri="{FF2B5EF4-FFF2-40B4-BE49-F238E27FC236}">
+              <a16:creationId xmlns:a16="http://schemas.microsoft.com/office/drawing/2014/main" id="{058FFF64-C8A5-94A9-6949-ED5298E8FB97}"/>
+            </a:ext>
+          </a:extLst>
+        </p:cNvPr>
+        <p:cNvGrpSpPr/>
+        <p:nvPr/>
+      </p:nvGrpSpPr>
+      <p:grpSpPr>
+        <a:xfrm>
+          <a:off x="0" y="0"/>
+          <a:ext cx="0" cy="0"/>
+          <a:chOff x="0" y="0"/>
+          <a:chExt cx="0" cy="0"/>
+        </a:xfrm>
+      </p:grpSpPr>
+      <p:grpSp>
+        <p:nvGrpSpPr>
+          <p:cNvPr id="12" name="Grupo 11">
+            <a:extLst>
+              <a:ext uri="{FF2B5EF4-FFF2-40B4-BE49-F238E27FC236}">
+                <a16:creationId xmlns:a16="http://schemas.microsoft.com/office/drawing/2014/main" id="{769988F5-F84F-AC6D-C906-A090FB9184E6}"/>
+              </a:ext>
+            </a:extLst>
+          </p:cNvPr>
+          <p:cNvGrpSpPr/>
+          <p:nvPr/>
+        </p:nvGrpSpPr>
+        <p:grpSpPr>
+          <a:xfrm>
+            <a:off x="237509" y="609600"/>
+            <a:ext cx="7422465" cy="5475514"/>
+            <a:chOff x="237509" y="609600"/>
+            <a:chExt cx="7422465" cy="5475514"/>
+          </a:xfrm>
+        </p:grpSpPr>
+        <p:pic>
+          <p:nvPicPr>
+            <p:cNvPr id="3" name="Imagen 2">
+              <a:extLst>
+                <a:ext uri="{FF2B5EF4-FFF2-40B4-BE49-F238E27FC236}">
+                  <a16:creationId xmlns:a16="http://schemas.microsoft.com/office/drawing/2014/main" id="{1BF3B897-786D-C94F-5259-15244DD055D3}"/>
+                </a:ext>
+              </a:extLst>
+            </p:cNvPr>
+            <p:cNvPicPr>
+              <a:picLocks noChangeAspect="1"/>
+            </p:cNvPicPr>
+            <p:nvPr/>
+          </p:nvPicPr>
+          <p:blipFill>
+            <a:blip r:embed="rId2"/>
+            <a:srcRect r="34763"/>
+            <a:stretch>
+              <a:fillRect/>
+            </a:stretch>
+          </p:blipFill>
+          <p:spPr>
+            <a:xfrm>
+              <a:off x="237509" y="609600"/>
+              <a:ext cx="7422465" cy="5475514"/>
+            </a:xfrm>
+            <a:prstGeom prst="rect">
+              <a:avLst/>
+            </a:prstGeom>
+          </p:spPr>
+        </p:pic>
+        <p:sp>
+          <p:nvSpPr>
+            <p:cNvPr id="5" name="Rectángulo: esquinas redondeadas 4">
+              <a:extLst>
+                <a:ext uri="{FF2B5EF4-FFF2-40B4-BE49-F238E27FC236}">
+                  <a16:creationId xmlns:a16="http://schemas.microsoft.com/office/drawing/2014/main" id="{83A5D6CE-9499-A981-D748-C282AE3B9A76}"/>
+                </a:ext>
+              </a:extLst>
+            </p:cNvPr>
+            <p:cNvSpPr/>
+            <p:nvPr/>
+          </p:nvSpPr>
+          <p:spPr>
+            <a:xfrm>
+              <a:off x="2149175" y="2201650"/>
+              <a:ext cx="2063061" cy="459825"/>
+            </a:xfrm>
+            <a:prstGeom prst="roundRect">
+              <a:avLst/>
+            </a:prstGeom>
+            <a:noFill/>
+            <a:ln w="28575">
+              <a:solidFill>
+                <a:schemeClr val="accent5">
+                  <a:lumMod val="75000"/>
+                </a:schemeClr>
+              </a:solidFill>
+            </a:ln>
+          </p:spPr>
+          <p:style>
+            <a:lnRef idx="2">
+              <a:schemeClr val="accent1">
+                <a:shade val="15000"/>
+              </a:schemeClr>
+            </a:lnRef>
+            <a:fillRef idx="1">
+              <a:schemeClr val="accent1"/>
+            </a:fillRef>
+            <a:effectRef idx="0">
+              <a:schemeClr val="accent1"/>
+            </a:effectRef>
+            <a:fontRef idx="minor">
+              <a:schemeClr val="lt1"/>
+            </a:fontRef>
+          </p:style>
+          <p:txBody>
+            <a:bodyPr rtlCol="0" anchor="ctr"/>
+            <a:lstStyle/>
+            <a:p>
+              <a:pPr algn="ctr"/>
+              <a:endParaRPr lang="es-CO" dirty="0"/>
+            </a:p>
+          </p:txBody>
+        </p:sp>
+        <p:grpSp>
+          <p:nvGrpSpPr>
+            <p:cNvPr id="11" name="Grupo 10">
+              <a:extLst>
+                <a:ext uri="{FF2B5EF4-FFF2-40B4-BE49-F238E27FC236}">
+                  <a16:creationId xmlns:a16="http://schemas.microsoft.com/office/drawing/2014/main" id="{F62A8F66-E693-90D3-316C-D05ACEA3F1C0}"/>
+                </a:ext>
+              </a:extLst>
+            </p:cNvPr>
+            <p:cNvGrpSpPr/>
+            <p:nvPr/>
+          </p:nvGrpSpPr>
+          <p:grpSpPr>
+            <a:xfrm>
+              <a:off x="4212236" y="2201650"/>
+              <a:ext cx="1100727" cy="459825"/>
+              <a:chOff x="4212236" y="2201650"/>
+              <a:chExt cx="1100727" cy="459825"/>
+            </a:xfrm>
+          </p:grpSpPr>
+          <p:cxnSp>
+            <p:nvCxnSpPr>
+              <p:cNvPr id="7" name="Conector recto de flecha 6">
+                <a:extLst>
+                  <a:ext uri="{FF2B5EF4-FFF2-40B4-BE49-F238E27FC236}">
+                    <a16:creationId xmlns:a16="http://schemas.microsoft.com/office/drawing/2014/main" id="{B63E3F4F-B853-4886-4224-65E1B771D39E}"/>
+                  </a:ext>
+                </a:extLst>
+              </p:cNvPr>
+              <p:cNvCxnSpPr>
+                <a:cxnSpLocks/>
+              </p:cNvCxnSpPr>
+              <p:nvPr/>
+            </p:nvCxnSpPr>
+            <p:spPr>
+              <a:xfrm flipH="1">
+                <a:off x="4212236" y="2431562"/>
+                <a:ext cx="764498" cy="0"/>
+              </a:xfrm>
+              <a:prstGeom prst="straightConnector1">
+                <a:avLst/>
+              </a:prstGeom>
+              <a:ln w="38100">
+                <a:solidFill>
+                  <a:schemeClr val="accent5">
+                    <a:lumMod val="75000"/>
+                  </a:schemeClr>
+                </a:solidFill>
+                <a:tailEnd type="triangle"/>
+              </a:ln>
+            </p:spPr>
+            <p:style>
+              <a:lnRef idx="1">
+                <a:schemeClr val="accent1"/>
+              </a:lnRef>
+              <a:fillRef idx="0">
+                <a:schemeClr val="accent1"/>
+              </a:fillRef>
+              <a:effectRef idx="0">
+                <a:schemeClr val="accent1"/>
+              </a:effectRef>
+              <a:fontRef idx="minor">
+                <a:schemeClr val="tx1"/>
+              </a:fontRef>
+            </p:style>
+          </p:cxnSp>
+          <p:sp>
+            <p:nvSpPr>
+              <p:cNvPr id="10" name="Elipse 9">
+                <a:extLst>
+                  <a:ext uri="{FF2B5EF4-FFF2-40B4-BE49-F238E27FC236}">
+                    <a16:creationId xmlns:a16="http://schemas.microsoft.com/office/drawing/2014/main" id="{D2369AA7-B54B-BDF6-D288-345F44519402}"/>
+                  </a:ext>
+                </a:extLst>
+              </p:cNvPr>
+              <p:cNvSpPr/>
+              <p:nvPr/>
+            </p:nvSpPr>
+            <p:spPr>
+              <a:xfrm>
+                <a:off x="4831177" y="2201650"/>
+                <a:ext cx="481786" cy="459825"/>
+              </a:xfrm>
+              <a:prstGeom prst="ellipse">
+                <a:avLst/>
+              </a:prstGeom>
+              <a:solidFill>
+                <a:schemeClr val="accent5">
+                  <a:lumMod val="75000"/>
+                </a:schemeClr>
+              </a:solidFill>
+              <a:ln>
+                <a:solidFill>
+                  <a:schemeClr val="accent5">
+                    <a:lumMod val="75000"/>
+                  </a:schemeClr>
+                </a:solidFill>
+              </a:ln>
+            </p:spPr>
+            <p:style>
+              <a:lnRef idx="2">
+                <a:schemeClr val="accent1">
+                  <a:shade val="15000"/>
+                </a:schemeClr>
+              </a:lnRef>
+              <a:fillRef idx="1">
+                <a:schemeClr val="accent1"/>
+              </a:fillRef>
+              <a:effectRef idx="0">
+                <a:schemeClr val="accent1"/>
+              </a:effectRef>
+              <a:fontRef idx="minor">
+                <a:schemeClr val="lt1"/>
+              </a:fontRef>
+            </p:style>
+            <p:txBody>
+              <a:bodyPr rtlCol="0" anchor="ctr"/>
+              <a:lstStyle/>
+              <a:p>
+                <a:pPr algn="ctr"/>
+                <a:r>
+                  <a:rPr lang="es-ES" b="1" dirty="0">
+                    <a:latin typeface="Aptos Light" panose="020F0502020204030204" pitchFamily="34" charset="0"/>
+                  </a:rPr>
+                  <a:t>8</a:t>
+                </a:r>
+                <a:endParaRPr lang="es-CO" b="1" dirty="0">
+                  <a:latin typeface="Aptos Light" panose="020F0502020204030204" pitchFamily="34" charset="0"/>
+                </a:endParaRPr>
+              </a:p>
+            </p:txBody>
+          </p:sp>
+        </p:grpSp>
+      </p:grpSp>
+    </p:spTree>
+    <p:extLst>
+      <p:ext uri="{BB962C8B-B14F-4D97-AF65-F5344CB8AC3E}">
+        <p14:creationId xmlns:p14="http://schemas.microsoft.com/office/powerpoint/2010/main" val="1522765426"/>
+      </p:ext>
+    </p:extLst>
+  </p:cSld>
+  <p:clrMapOvr>
+    <a:masterClrMapping/>
+  </p:clrMapOvr>
+</p:sld>
+</file>
+
+<file path=ppt/slides/slide7.xml><?xml version="1.0" encoding="utf-8"?>
+<p:sld xmlns:a="http://schemas.openxmlformats.org/drawingml/2006/main" xmlns:r="http://schemas.openxmlformats.org/officeDocument/2006/relationships" xmlns:p="http://schemas.openxmlformats.org/presentationml/2006/main">
+  <p:cSld>
+    <p:spTree>
+      <p:nvGrpSpPr>
+        <p:cNvPr id="1" name="">
+          <a:extLst>
+            <a:ext uri="{FF2B5EF4-FFF2-40B4-BE49-F238E27FC236}">
+              <a16:creationId xmlns:a16="http://schemas.microsoft.com/office/drawing/2014/main" id="{04891279-CA9C-423D-DD1C-B8521FB6192C}"/>
+            </a:ext>
+          </a:extLst>
+        </p:cNvPr>
+        <p:cNvGrpSpPr/>
+        <p:nvPr/>
+      </p:nvGrpSpPr>
+      <p:grpSpPr>
+        <a:xfrm>
+          <a:off x="0" y="0"/>
+          <a:ext cx="0" cy="0"/>
+          <a:chOff x="0" y="0"/>
+          <a:chExt cx="0" cy="0"/>
+        </a:xfrm>
+      </p:grpSpPr>
+      <p:grpSp>
+        <p:nvGrpSpPr>
+          <p:cNvPr id="21" name="Grupo 20">
+            <a:extLst>
+              <a:ext uri="{FF2B5EF4-FFF2-40B4-BE49-F238E27FC236}">
+                <a16:creationId xmlns:a16="http://schemas.microsoft.com/office/drawing/2014/main" id="{E85FB96C-2155-83C3-EE2B-3204C93DF946}"/>
+              </a:ext>
+            </a:extLst>
+          </p:cNvPr>
+          <p:cNvGrpSpPr/>
+          <p:nvPr/>
+        </p:nvGrpSpPr>
+        <p:grpSpPr>
+          <a:xfrm>
+            <a:off x="1558946" y="316583"/>
+            <a:ext cx="8816023" cy="6316123"/>
+            <a:chOff x="1558946" y="316583"/>
+            <a:chExt cx="8816023" cy="6316123"/>
+          </a:xfrm>
+        </p:grpSpPr>
+        <p:pic>
+          <p:nvPicPr>
+            <p:cNvPr id="20" name="Imagen 19">
+              <a:extLst>
+                <a:ext uri="{FF2B5EF4-FFF2-40B4-BE49-F238E27FC236}">
+                  <a16:creationId xmlns:a16="http://schemas.microsoft.com/office/drawing/2014/main" id="{179E9F34-673E-D5E0-637A-E405F92B4F77}"/>
+                </a:ext>
+              </a:extLst>
+            </p:cNvPr>
+            <p:cNvPicPr>
+              <a:picLocks noChangeAspect="1"/>
+            </p:cNvPicPr>
+            <p:nvPr/>
+          </p:nvPicPr>
+          <p:blipFill>
+            <a:blip r:embed="rId2"/>
+            <a:stretch>
+              <a:fillRect/>
+            </a:stretch>
+          </p:blipFill>
+          <p:spPr>
+            <a:xfrm>
+              <a:off x="1975415" y="316583"/>
+              <a:ext cx="8295256" cy="6316123"/>
+            </a:xfrm>
+            <a:prstGeom prst="rect">
+              <a:avLst/>
+            </a:prstGeom>
+          </p:spPr>
+        </p:pic>
+        <p:sp>
+          <p:nvSpPr>
+            <p:cNvPr id="6" name="Elipse 5">
+              <a:extLst>
+                <a:ext uri="{FF2B5EF4-FFF2-40B4-BE49-F238E27FC236}">
+                  <a16:creationId xmlns:a16="http://schemas.microsoft.com/office/drawing/2014/main" id="{2D5F8E49-3C00-7180-3EC6-EC78233CA258}"/>
+                </a:ext>
+              </a:extLst>
+            </p:cNvPr>
+            <p:cNvSpPr/>
+            <p:nvPr/>
+          </p:nvSpPr>
+          <p:spPr>
+            <a:xfrm>
+              <a:off x="1567541" y="2110522"/>
+              <a:ext cx="636996" cy="587868"/>
+            </a:xfrm>
+            <a:prstGeom prst="ellipse">
+              <a:avLst/>
+            </a:prstGeom>
+            <a:solidFill>
+              <a:schemeClr val="accent5">
+                <a:lumMod val="75000"/>
+              </a:schemeClr>
+            </a:solidFill>
+            <a:ln>
+              <a:solidFill>
+                <a:schemeClr val="accent5">
+                  <a:lumMod val="75000"/>
+                </a:schemeClr>
+              </a:solidFill>
+            </a:ln>
+          </p:spPr>
+          <p:style>
+            <a:lnRef idx="2">
+              <a:schemeClr val="accent1">
+                <a:shade val="15000"/>
+              </a:schemeClr>
+            </a:lnRef>
+            <a:fillRef idx="1">
+              <a:schemeClr val="accent1"/>
+            </a:fillRef>
+            <a:effectRef idx="0">
+              <a:schemeClr val="accent1"/>
+            </a:effectRef>
+            <a:fontRef idx="minor">
+              <a:schemeClr val="lt1"/>
+            </a:fontRef>
+          </p:style>
+          <p:txBody>
+            <a:bodyPr rtlCol="0" anchor="ctr"/>
+            <a:lstStyle/>
+            <a:p>
+              <a:pPr algn="ctr"/>
+              <a:r>
+                <a:rPr lang="es-ES" b="1" dirty="0">
+                  <a:latin typeface="Aptos Light" panose="020F0502020204030204" pitchFamily="34" charset="0"/>
+                </a:rPr>
+                <a:t>10</a:t>
+              </a:r>
+              <a:endParaRPr lang="es-CO" b="1" dirty="0">
+                <a:latin typeface="Aptos Light" panose="020F0502020204030204" pitchFamily="34" charset="0"/>
+              </a:endParaRPr>
+            </a:p>
+          </p:txBody>
+        </p:sp>
+        <p:sp>
+          <p:nvSpPr>
+            <p:cNvPr id="11" name="Elipse 10">
+              <a:extLst>
+                <a:ext uri="{FF2B5EF4-FFF2-40B4-BE49-F238E27FC236}">
+                  <a16:creationId xmlns:a16="http://schemas.microsoft.com/office/drawing/2014/main" id="{B4437021-2730-3AB3-0F0F-BDF8D3D3C60E}"/>
+                </a:ext>
+              </a:extLst>
+            </p:cNvPr>
+            <p:cNvSpPr/>
+            <p:nvPr/>
+          </p:nvSpPr>
+          <p:spPr>
+            <a:xfrm>
+              <a:off x="1567543" y="1130807"/>
+              <a:ext cx="636996" cy="587868"/>
+            </a:xfrm>
+            <a:prstGeom prst="ellipse">
+              <a:avLst/>
+            </a:prstGeom>
+            <a:solidFill>
+              <a:schemeClr val="accent5">
+                <a:lumMod val="75000"/>
+              </a:schemeClr>
+            </a:solidFill>
+            <a:ln>
+              <a:solidFill>
+                <a:schemeClr val="accent5">
+                  <a:lumMod val="75000"/>
+                </a:schemeClr>
+              </a:solidFill>
+            </a:ln>
+          </p:spPr>
+          <p:style>
+            <a:lnRef idx="2">
+              <a:schemeClr val="accent1">
+                <a:shade val="15000"/>
+              </a:schemeClr>
+            </a:lnRef>
+            <a:fillRef idx="1">
+              <a:schemeClr val="accent1"/>
+            </a:fillRef>
+            <a:effectRef idx="0">
+              <a:schemeClr val="accent1"/>
+            </a:effectRef>
+            <a:fontRef idx="minor">
+              <a:schemeClr val="lt1"/>
+            </a:fontRef>
+          </p:style>
+          <p:txBody>
+            <a:bodyPr rtlCol="0" anchor="ctr"/>
+            <a:lstStyle/>
+            <a:p>
+              <a:pPr algn="ctr"/>
+              <a:r>
+                <a:rPr lang="es-ES" b="1" dirty="0">
+                  <a:latin typeface="Aptos Light" panose="020F0502020204030204" pitchFamily="34" charset="0"/>
+                </a:rPr>
+                <a:t>9</a:t>
+              </a:r>
+              <a:endParaRPr lang="es-CO" b="1" dirty="0">
+                <a:latin typeface="Aptos Light" panose="020F0502020204030204" pitchFamily="34" charset="0"/>
+              </a:endParaRPr>
+            </a:p>
+          </p:txBody>
+        </p:sp>
+        <p:sp>
+          <p:nvSpPr>
+            <p:cNvPr id="12" name="Elipse 11">
+              <a:extLst>
+                <a:ext uri="{FF2B5EF4-FFF2-40B4-BE49-F238E27FC236}">
+                  <a16:creationId xmlns:a16="http://schemas.microsoft.com/office/drawing/2014/main" id="{9125C5E9-CCC5-7575-AB4E-B38F46745960}"/>
+                </a:ext>
+              </a:extLst>
+            </p:cNvPr>
+            <p:cNvSpPr/>
+            <p:nvPr/>
+          </p:nvSpPr>
+          <p:spPr>
+            <a:xfrm>
+              <a:off x="1569832" y="3090237"/>
+              <a:ext cx="636996" cy="587868"/>
+            </a:xfrm>
+            <a:prstGeom prst="ellipse">
+              <a:avLst/>
+            </a:prstGeom>
+            <a:solidFill>
+              <a:schemeClr val="accent5">
+                <a:lumMod val="75000"/>
+              </a:schemeClr>
+            </a:solidFill>
+            <a:ln>
+              <a:solidFill>
+                <a:schemeClr val="accent5">
+                  <a:lumMod val="75000"/>
+                </a:schemeClr>
+              </a:solidFill>
+            </a:ln>
+          </p:spPr>
+          <p:style>
+            <a:lnRef idx="2">
+              <a:schemeClr val="accent1">
+                <a:shade val="15000"/>
+              </a:schemeClr>
+            </a:lnRef>
+            <a:fillRef idx="1">
+              <a:schemeClr val="accent1"/>
+            </a:fillRef>
+            <a:effectRef idx="0">
+              <a:schemeClr val="accent1"/>
+            </a:effectRef>
+            <a:fontRef idx="minor">
+              <a:schemeClr val="lt1"/>
+            </a:fontRef>
+          </p:style>
+          <p:txBody>
+            <a:bodyPr rtlCol="0" anchor="ctr"/>
+            <a:lstStyle/>
+            <a:p>
+              <a:pPr algn="ctr"/>
+              <a:r>
+                <a:rPr lang="es-ES" b="1" dirty="0">
+                  <a:latin typeface="Aptos Light" panose="020F0502020204030204" pitchFamily="34" charset="0"/>
+                </a:rPr>
+                <a:t>11</a:t>
+              </a:r>
+              <a:endParaRPr lang="es-CO" b="1" dirty="0">
+                <a:latin typeface="Aptos Light" panose="020F0502020204030204" pitchFamily="34" charset="0"/>
+              </a:endParaRPr>
+            </a:p>
+          </p:txBody>
+        </p:sp>
+        <p:sp>
+          <p:nvSpPr>
+            <p:cNvPr id="13" name="Elipse 12">
+              <a:extLst>
+                <a:ext uri="{FF2B5EF4-FFF2-40B4-BE49-F238E27FC236}">
+                  <a16:creationId xmlns:a16="http://schemas.microsoft.com/office/drawing/2014/main" id="{69D8E26B-7BDC-3696-75F9-E3063B396C6B}"/>
+                </a:ext>
+              </a:extLst>
+            </p:cNvPr>
+            <p:cNvSpPr/>
+            <p:nvPr/>
+          </p:nvSpPr>
+          <p:spPr>
+            <a:xfrm>
+              <a:off x="1558946" y="4069952"/>
+              <a:ext cx="636996" cy="587868"/>
+            </a:xfrm>
+            <a:prstGeom prst="ellipse">
+              <a:avLst/>
+            </a:prstGeom>
+            <a:solidFill>
+              <a:schemeClr val="accent5">
+                <a:lumMod val="75000"/>
+              </a:schemeClr>
+            </a:solidFill>
+            <a:ln>
+              <a:solidFill>
+                <a:schemeClr val="accent5">
+                  <a:lumMod val="75000"/>
+                </a:schemeClr>
+              </a:solidFill>
+            </a:ln>
+          </p:spPr>
+          <p:style>
+            <a:lnRef idx="2">
+              <a:schemeClr val="accent1">
+                <a:shade val="15000"/>
+              </a:schemeClr>
+            </a:lnRef>
+            <a:fillRef idx="1">
+              <a:schemeClr val="accent1"/>
+            </a:fillRef>
+            <a:effectRef idx="0">
+              <a:schemeClr val="accent1"/>
+            </a:effectRef>
+            <a:fontRef idx="minor">
+              <a:schemeClr val="lt1"/>
+            </a:fontRef>
+          </p:style>
+          <p:txBody>
+            <a:bodyPr rtlCol="0" anchor="ctr"/>
+            <a:lstStyle/>
+            <a:p>
+              <a:pPr algn="ctr"/>
+              <a:r>
+                <a:rPr lang="es-ES" b="1" dirty="0">
+                  <a:latin typeface="Aptos Light" panose="020F0502020204030204" pitchFamily="34" charset="0"/>
+                </a:rPr>
+                <a:t>12</a:t>
+              </a:r>
+              <a:endParaRPr lang="es-CO" b="1" dirty="0">
+                <a:latin typeface="Aptos Light" panose="020F0502020204030204" pitchFamily="34" charset="0"/>
+              </a:endParaRPr>
+            </a:p>
+          </p:txBody>
+        </p:sp>
+        <p:sp>
+          <p:nvSpPr>
+            <p:cNvPr id="14" name="Elipse 13">
+              <a:extLst>
+                <a:ext uri="{FF2B5EF4-FFF2-40B4-BE49-F238E27FC236}">
+                  <a16:creationId xmlns:a16="http://schemas.microsoft.com/office/drawing/2014/main" id="{244B0086-21D9-13F1-DC10-E65B5CD3B56C}"/>
+                </a:ext>
+              </a:extLst>
+            </p:cNvPr>
+            <p:cNvSpPr/>
+            <p:nvPr/>
+          </p:nvSpPr>
+          <p:spPr>
+            <a:xfrm>
+              <a:off x="1558946" y="5037514"/>
+              <a:ext cx="636996" cy="587868"/>
+            </a:xfrm>
+            <a:prstGeom prst="ellipse">
+              <a:avLst/>
+            </a:prstGeom>
+            <a:solidFill>
+              <a:schemeClr val="accent5">
+                <a:lumMod val="75000"/>
+              </a:schemeClr>
+            </a:solidFill>
+            <a:ln>
+              <a:solidFill>
+                <a:schemeClr val="accent5">
+                  <a:lumMod val="75000"/>
+                </a:schemeClr>
+              </a:solidFill>
+            </a:ln>
+          </p:spPr>
+          <p:style>
+            <a:lnRef idx="2">
+              <a:schemeClr val="accent1">
+                <a:shade val="15000"/>
+              </a:schemeClr>
+            </a:lnRef>
+            <a:fillRef idx="1">
+              <a:schemeClr val="accent1"/>
+            </a:fillRef>
+            <a:effectRef idx="0">
+              <a:schemeClr val="accent1"/>
+            </a:effectRef>
+            <a:fontRef idx="minor">
+              <a:schemeClr val="lt1"/>
+            </a:fontRef>
+          </p:style>
+          <p:txBody>
+            <a:bodyPr rtlCol="0" anchor="ctr"/>
+            <a:lstStyle/>
+            <a:p>
+              <a:pPr algn="ctr"/>
+              <a:r>
+                <a:rPr lang="es-ES" b="1" dirty="0">
+                  <a:latin typeface="Aptos Light" panose="020F0502020204030204" pitchFamily="34" charset="0"/>
+                </a:rPr>
+                <a:t>13</a:t>
+              </a:r>
+              <a:endParaRPr lang="es-CO" b="1" dirty="0">
+                <a:latin typeface="Aptos Light" panose="020F0502020204030204" pitchFamily="34" charset="0"/>
+              </a:endParaRPr>
+            </a:p>
+          </p:txBody>
+        </p:sp>
+        <p:sp>
+          <p:nvSpPr>
+            <p:cNvPr id="15" name="Elipse 14">
+              <a:extLst>
+                <a:ext uri="{FF2B5EF4-FFF2-40B4-BE49-F238E27FC236}">
+                  <a16:creationId xmlns:a16="http://schemas.microsoft.com/office/drawing/2014/main" id="{94BB8E45-F049-D5B5-DA79-F68F74D1A41A}"/>
+                </a:ext>
+              </a:extLst>
+            </p:cNvPr>
+            <p:cNvSpPr/>
+            <p:nvPr/>
+          </p:nvSpPr>
+          <p:spPr>
+            <a:xfrm>
+              <a:off x="9737973" y="5485094"/>
+              <a:ext cx="636996" cy="587868"/>
+            </a:xfrm>
+            <a:prstGeom prst="ellipse">
+              <a:avLst/>
+            </a:prstGeom>
+            <a:solidFill>
+              <a:schemeClr val="accent5">
+                <a:lumMod val="75000"/>
+              </a:schemeClr>
+            </a:solidFill>
+            <a:ln>
+              <a:solidFill>
+                <a:schemeClr val="accent5">
+                  <a:lumMod val="75000"/>
+                </a:schemeClr>
+              </a:solidFill>
+            </a:ln>
+          </p:spPr>
+          <p:style>
+            <a:lnRef idx="2">
+              <a:schemeClr val="accent1">
+                <a:shade val="15000"/>
+              </a:schemeClr>
+            </a:lnRef>
+            <a:fillRef idx="1">
+              <a:schemeClr val="accent1"/>
+            </a:fillRef>
+            <a:effectRef idx="0">
+              <a:schemeClr val="accent1"/>
+            </a:effectRef>
+            <a:fontRef idx="minor">
+              <a:schemeClr val="lt1"/>
+            </a:fontRef>
+          </p:style>
+          <p:txBody>
+            <a:bodyPr rtlCol="0" anchor="ctr"/>
+            <a:lstStyle/>
+            <a:p>
+              <a:pPr algn="ctr"/>
+              <a:r>
+                <a:rPr lang="es-ES" b="1" dirty="0">
+                  <a:latin typeface="Aptos Light" panose="020F0502020204030204" pitchFamily="34" charset="0"/>
+                </a:rPr>
+                <a:t>14</a:t>
+              </a:r>
+              <a:endParaRPr lang="es-CO" b="1" dirty="0">
+                <a:latin typeface="Aptos Light" panose="020F0502020204030204" pitchFamily="34" charset="0"/>
+              </a:endParaRPr>
+            </a:p>
+          </p:txBody>
+        </p:sp>
+      </p:grpSp>
+    </p:spTree>
+    <p:extLst>
+      <p:ext uri="{BB962C8B-B14F-4D97-AF65-F5344CB8AC3E}">
+        <p14:creationId xmlns:p14="http://schemas.microsoft.com/office/powerpoint/2010/main" val="3562961549"/>
+      </p:ext>
+    </p:extLst>
+  </p:cSld>
+  <p:clrMapOvr>
+    <a:masterClrMapping/>
+  </p:clrMapOvr>
+</p:sld>
+</file>
+
+<file path=ppt/slides/slide8.xml><?xml version="1.0" encoding="utf-8"?>
+<p:sld xmlns:a="http://schemas.openxmlformats.org/drawingml/2006/main" xmlns:r="http://schemas.openxmlformats.org/officeDocument/2006/relationships" xmlns:p="http://schemas.openxmlformats.org/presentationml/2006/main">
+  <p:cSld>
+    <p:spTree>
+      <p:nvGrpSpPr>
+        <p:cNvPr id="1" name="">
+          <a:extLst>
+            <a:ext uri="{FF2B5EF4-FFF2-40B4-BE49-F238E27FC236}">
+              <a16:creationId xmlns:a16="http://schemas.microsoft.com/office/drawing/2014/main" id="{5EFC4889-0BEB-8EE2-583B-4870E83E000B}"/>
+            </a:ext>
+          </a:extLst>
+        </p:cNvPr>
+        <p:cNvGrpSpPr/>
+        <p:nvPr/>
+      </p:nvGrpSpPr>
+      <p:grpSpPr>
+        <a:xfrm>
+          <a:off x="0" y="0"/>
+          <a:ext cx="0" cy="0"/>
+          <a:chOff x="0" y="0"/>
+          <a:chExt cx="0" cy="0"/>
+        </a:xfrm>
+      </p:grpSpPr>
+      <p:grpSp>
+        <p:nvGrpSpPr>
+          <p:cNvPr id="16" name="Grupo 15">
+            <a:extLst>
+              <a:ext uri="{FF2B5EF4-FFF2-40B4-BE49-F238E27FC236}">
+                <a16:creationId xmlns:a16="http://schemas.microsoft.com/office/drawing/2014/main" id="{A9C245DE-7DF0-6F40-3C87-5CC75D045105}"/>
+              </a:ext>
+            </a:extLst>
+          </p:cNvPr>
+          <p:cNvGrpSpPr/>
+          <p:nvPr/>
+        </p:nvGrpSpPr>
+        <p:grpSpPr>
+          <a:xfrm>
+            <a:off x="927894" y="374269"/>
+            <a:ext cx="7105085" cy="3588132"/>
+            <a:chOff x="912904" y="374269"/>
+            <a:chExt cx="7105085" cy="3588132"/>
+          </a:xfrm>
+        </p:grpSpPr>
+        <p:pic>
+          <p:nvPicPr>
+            <p:cNvPr id="4" name="Imagen 3">
+              <a:extLst>
+                <a:ext uri="{FF2B5EF4-FFF2-40B4-BE49-F238E27FC236}">
+                  <a16:creationId xmlns:a16="http://schemas.microsoft.com/office/drawing/2014/main" id="{73263813-0648-A474-712A-1CF35373FACA}"/>
+                </a:ext>
+              </a:extLst>
+            </p:cNvPr>
+            <p:cNvPicPr>
+              <a:picLocks noChangeAspect="1"/>
+            </p:cNvPicPr>
+            <p:nvPr/>
+          </p:nvPicPr>
+          <p:blipFill>
+            <a:blip r:embed="rId2"/>
+            <a:srcRect r="40250" b="42215"/>
+            <a:stretch>
+              <a:fillRect/>
+            </a:stretch>
+          </p:blipFill>
+          <p:spPr>
+            <a:xfrm>
+              <a:off x="2011681" y="374269"/>
+              <a:ext cx="4960619" cy="3588132"/>
+            </a:xfrm>
+            <a:prstGeom prst="rect">
+              <a:avLst/>
+            </a:prstGeom>
+          </p:spPr>
+        </p:pic>
+        <p:sp>
+          <p:nvSpPr>
+            <p:cNvPr id="5" name="Rectángulo: esquinas redondeadas 4">
+              <a:extLst>
+                <a:ext uri="{FF2B5EF4-FFF2-40B4-BE49-F238E27FC236}">
+                  <a16:creationId xmlns:a16="http://schemas.microsoft.com/office/drawing/2014/main" id="{A4CF3919-2B58-16AE-45BA-AB9804D62657}"/>
+                </a:ext>
+              </a:extLst>
+            </p:cNvPr>
+            <p:cNvSpPr/>
+            <p:nvPr/>
+          </p:nvSpPr>
+          <p:spPr>
+            <a:xfrm>
+              <a:off x="2010783" y="832086"/>
+              <a:ext cx="2786068" cy="320842"/>
+            </a:xfrm>
+            <a:prstGeom prst="roundRect">
+              <a:avLst/>
+            </a:prstGeom>
+            <a:noFill/>
+            <a:ln w="28575">
+              <a:solidFill>
+                <a:schemeClr val="accent5">
+                  <a:lumMod val="75000"/>
+                </a:schemeClr>
+              </a:solidFill>
+            </a:ln>
+          </p:spPr>
+          <p:style>
+            <a:lnRef idx="2">
+              <a:schemeClr val="accent1">
+                <a:shade val="15000"/>
+              </a:schemeClr>
+            </a:lnRef>
+            <a:fillRef idx="1">
+              <a:schemeClr val="accent1"/>
+            </a:fillRef>
+            <a:effectRef idx="0">
+              <a:schemeClr val="accent1"/>
+            </a:effectRef>
+            <a:fontRef idx="minor">
+              <a:schemeClr val="lt1"/>
+            </a:fontRef>
+          </p:style>
+          <p:txBody>
+            <a:bodyPr rtlCol="0" anchor="ctr"/>
+            <a:lstStyle/>
+            <a:p>
+              <a:pPr algn="ctr"/>
+              <a:endParaRPr lang="es-CO" dirty="0"/>
+            </a:p>
+          </p:txBody>
+        </p:sp>
+        <p:sp>
+          <p:nvSpPr>
+            <p:cNvPr id="9" name="Rectángulo: esquinas redondeadas 8">
+              <a:extLst>
+                <a:ext uri="{FF2B5EF4-FFF2-40B4-BE49-F238E27FC236}">
+                  <a16:creationId xmlns:a16="http://schemas.microsoft.com/office/drawing/2014/main" id="{9368B740-EDFC-762E-B728-3B3E51FD0995}"/>
+                </a:ext>
+              </a:extLst>
+            </p:cNvPr>
+            <p:cNvSpPr/>
+            <p:nvPr/>
+          </p:nvSpPr>
+          <p:spPr>
+            <a:xfrm>
+              <a:off x="4816446" y="1404205"/>
+              <a:ext cx="2230804" cy="364633"/>
+            </a:xfrm>
+            <a:prstGeom prst="roundRect">
+              <a:avLst/>
+            </a:prstGeom>
+            <a:noFill/>
+            <a:ln w="28575">
+              <a:solidFill>
+                <a:schemeClr val="accent5">
+                  <a:lumMod val="75000"/>
+                </a:schemeClr>
+              </a:solidFill>
+            </a:ln>
+          </p:spPr>
+          <p:style>
+            <a:lnRef idx="2">
+              <a:schemeClr val="accent1">
+                <a:shade val="15000"/>
+              </a:schemeClr>
+            </a:lnRef>
+            <a:fillRef idx="1">
+              <a:schemeClr val="accent1"/>
+            </a:fillRef>
+            <a:effectRef idx="0">
+              <a:schemeClr val="accent1"/>
+            </a:effectRef>
+            <a:fontRef idx="minor">
+              <a:schemeClr val="lt1"/>
+            </a:fontRef>
+          </p:style>
+          <p:txBody>
+            <a:bodyPr rtlCol="0" anchor="ctr"/>
+            <a:lstStyle/>
+            <a:p>
+              <a:pPr algn="ctr"/>
+              <a:endParaRPr lang="es-CO" dirty="0"/>
+            </a:p>
+          </p:txBody>
+        </p:sp>
+        <p:sp>
+          <p:nvSpPr>
+            <p:cNvPr id="10" name="Elipse 9">
+              <a:extLst>
+                <a:ext uri="{FF2B5EF4-FFF2-40B4-BE49-F238E27FC236}">
+                  <a16:creationId xmlns:a16="http://schemas.microsoft.com/office/drawing/2014/main" id="{9D16F945-AAA8-B2A9-EDC8-B91E523EBDB6}"/>
+                </a:ext>
+              </a:extLst>
+            </p:cNvPr>
+            <p:cNvSpPr/>
+            <p:nvPr/>
+          </p:nvSpPr>
+          <p:spPr>
+            <a:xfrm>
+              <a:off x="912904" y="762594"/>
+              <a:ext cx="481786" cy="459825"/>
+            </a:xfrm>
+            <a:prstGeom prst="ellipse">
+              <a:avLst/>
+            </a:prstGeom>
+            <a:solidFill>
+              <a:schemeClr val="accent5">
+                <a:lumMod val="75000"/>
+              </a:schemeClr>
+            </a:solidFill>
+            <a:ln>
+              <a:solidFill>
+                <a:schemeClr val="accent5">
+                  <a:lumMod val="75000"/>
+                </a:schemeClr>
+              </a:solidFill>
+            </a:ln>
+          </p:spPr>
+          <p:style>
+            <a:lnRef idx="2">
+              <a:schemeClr val="accent1">
+                <a:shade val="15000"/>
+              </a:schemeClr>
+            </a:lnRef>
+            <a:fillRef idx="1">
+              <a:schemeClr val="accent1"/>
+            </a:fillRef>
+            <a:effectRef idx="0">
+              <a:schemeClr val="accent1"/>
+            </a:effectRef>
+            <a:fontRef idx="minor">
+              <a:schemeClr val="lt1"/>
+            </a:fontRef>
+          </p:style>
+          <p:txBody>
+            <a:bodyPr rtlCol="0" anchor="ctr"/>
+            <a:lstStyle/>
+            <a:p>
+              <a:pPr algn="ctr"/>
+              <a:r>
+                <a:rPr lang="es-ES" b="1" dirty="0">
+                  <a:latin typeface="Aptos Light" panose="020F0502020204030204" pitchFamily="34" charset="0"/>
+                </a:rPr>
+                <a:t>1</a:t>
+              </a:r>
+              <a:endParaRPr lang="es-CO" b="1" dirty="0">
+                <a:latin typeface="Aptos Light" panose="020F0502020204030204" pitchFamily="34" charset="0"/>
+              </a:endParaRPr>
+            </a:p>
+          </p:txBody>
+        </p:sp>
+        <p:sp>
+          <p:nvSpPr>
+            <p:cNvPr id="11" name="Elipse 10">
+              <a:extLst>
+                <a:ext uri="{FF2B5EF4-FFF2-40B4-BE49-F238E27FC236}">
+                  <a16:creationId xmlns:a16="http://schemas.microsoft.com/office/drawing/2014/main" id="{FE627E1F-618B-B25D-2085-E95E3E251E53}"/>
+                </a:ext>
+              </a:extLst>
+            </p:cNvPr>
+            <p:cNvSpPr/>
+            <p:nvPr/>
+          </p:nvSpPr>
+          <p:spPr>
+            <a:xfrm>
+              <a:off x="7536203" y="1347271"/>
+              <a:ext cx="481786" cy="459825"/>
+            </a:xfrm>
+            <a:prstGeom prst="ellipse">
+              <a:avLst/>
+            </a:prstGeom>
+            <a:solidFill>
+              <a:schemeClr val="accent5">
+                <a:lumMod val="75000"/>
+              </a:schemeClr>
+            </a:solidFill>
+            <a:ln>
+              <a:solidFill>
+                <a:schemeClr val="accent5">
+                  <a:lumMod val="75000"/>
+                </a:schemeClr>
+              </a:solidFill>
+            </a:ln>
+          </p:spPr>
+          <p:style>
+            <a:lnRef idx="2">
+              <a:schemeClr val="accent1">
+                <a:shade val="15000"/>
+              </a:schemeClr>
+            </a:lnRef>
+            <a:fillRef idx="1">
+              <a:schemeClr val="accent1"/>
+            </a:fillRef>
+            <a:effectRef idx="0">
+              <a:schemeClr val="accent1"/>
+            </a:effectRef>
+            <a:fontRef idx="minor">
+              <a:schemeClr val="lt1"/>
+            </a:fontRef>
+          </p:style>
+          <p:txBody>
+            <a:bodyPr rtlCol="0" anchor="ctr"/>
+            <a:lstStyle/>
+            <a:p>
+              <a:pPr algn="ctr"/>
+              <a:r>
+                <a:rPr lang="es-ES" b="1" dirty="0">
+                  <a:latin typeface="Aptos Light" panose="020F0502020204030204" pitchFamily="34" charset="0"/>
+                </a:rPr>
+                <a:t>2</a:t>
+              </a:r>
+              <a:endParaRPr lang="es-CO" b="1" dirty="0">
+                <a:latin typeface="Aptos Light" panose="020F0502020204030204" pitchFamily="34" charset="0"/>
+              </a:endParaRPr>
+            </a:p>
+          </p:txBody>
+        </p:sp>
+        <p:cxnSp>
+          <p:nvCxnSpPr>
+            <p:cNvPr id="13" name="Conector recto de flecha 12">
+              <a:extLst>
+                <a:ext uri="{FF2B5EF4-FFF2-40B4-BE49-F238E27FC236}">
+                  <a16:creationId xmlns:a16="http://schemas.microsoft.com/office/drawing/2014/main" id="{3D69E4AC-B143-33AC-2179-3EA37A89B6EA}"/>
+                </a:ext>
+              </a:extLst>
+            </p:cNvPr>
+            <p:cNvCxnSpPr>
+              <a:cxnSpLocks/>
+              <a:endCxn id="5" idx="1"/>
+            </p:cNvCxnSpPr>
+            <p:nvPr/>
+          </p:nvCxnSpPr>
+          <p:spPr>
+            <a:xfrm>
+              <a:off x="1394690" y="992506"/>
+              <a:ext cx="616093" cy="1"/>
+            </a:xfrm>
+            <a:prstGeom prst="straightConnector1">
+              <a:avLst/>
+            </a:prstGeom>
+            <a:ln w="38100">
+              <a:solidFill>
+                <a:schemeClr val="accent5">
+                  <a:lumMod val="75000"/>
+                </a:schemeClr>
+              </a:solidFill>
+              <a:tailEnd type="triangle"/>
+            </a:ln>
+          </p:spPr>
+          <p:style>
+            <a:lnRef idx="1">
+              <a:schemeClr val="accent1"/>
+            </a:lnRef>
+            <a:fillRef idx="0">
+              <a:schemeClr val="accent1"/>
+            </a:fillRef>
+            <a:effectRef idx="0">
+              <a:schemeClr val="accent1"/>
+            </a:effectRef>
+            <a:fontRef idx="minor">
+              <a:schemeClr val="tx1"/>
+            </a:fontRef>
+          </p:style>
+        </p:cxnSp>
+        <p:cxnSp>
+          <p:nvCxnSpPr>
+            <p:cNvPr id="14" name="Conector recto de flecha 13">
+              <a:extLst>
+                <a:ext uri="{FF2B5EF4-FFF2-40B4-BE49-F238E27FC236}">
+                  <a16:creationId xmlns:a16="http://schemas.microsoft.com/office/drawing/2014/main" id="{A2E1F3FD-C8F5-4D20-8D78-291591340966}"/>
+                </a:ext>
+              </a:extLst>
+            </p:cNvPr>
+            <p:cNvCxnSpPr>
+              <a:cxnSpLocks/>
+            </p:cNvCxnSpPr>
+            <p:nvPr/>
+          </p:nvCxnSpPr>
+          <p:spPr>
+            <a:xfrm flipH="1">
+              <a:off x="7047250" y="1577184"/>
+              <a:ext cx="517937" cy="0"/>
+            </a:xfrm>
+            <a:prstGeom prst="straightConnector1">
+              <a:avLst/>
+            </a:prstGeom>
+            <a:ln w="38100">
+              <a:solidFill>
+                <a:schemeClr val="accent5">
+                  <a:lumMod val="75000"/>
+                </a:schemeClr>
+              </a:solidFill>
+              <a:tailEnd type="triangle"/>
+            </a:ln>
+          </p:spPr>
+          <p:style>
+            <a:lnRef idx="1">
+              <a:schemeClr val="accent1"/>
+            </a:lnRef>
+            <a:fillRef idx="0">
+              <a:schemeClr val="accent1"/>
+            </a:fillRef>
+            <a:effectRef idx="0">
+              <a:schemeClr val="accent1"/>
+            </a:effectRef>
+            <a:fontRef idx="minor">
+              <a:schemeClr val="tx1"/>
+            </a:fontRef>
+          </p:style>
+        </p:cxnSp>
+      </p:grpSp>
+    </p:spTree>
+    <p:extLst>
+      <p:ext uri="{BB962C8B-B14F-4D97-AF65-F5344CB8AC3E}">
+        <p14:creationId xmlns:p14="http://schemas.microsoft.com/office/powerpoint/2010/main" val="2655797413"/>
+      </p:ext>
+    </p:extLst>
+  </p:cSld>
+  <p:clrMapOvr>
+    <a:masterClrMapping/>
+  </p:clrMapOvr>
+</p:sld>
+</file>
+
+<file path=ppt/slides/slide9.xml><?xml version="1.0" encoding="utf-8"?>
+<p:sld xmlns:a="http://schemas.openxmlformats.org/drawingml/2006/main" xmlns:r="http://schemas.openxmlformats.org/officeDocument/2006/relationships" xmlns:p="http://schemas.openxmlformats.org/presentationml/2006/main">
+  <p:cSld>
+    <p:spTree>
+      <p:nvGrpSpPr>
+        <p:cNvPr id="1" name="">
+          <a:extLst>
+            <a:ext uri="{FF2B5EF4-FFF2-40B4-BE49-F238E27FC236}">
+              <a16:creationId xmlns:a16="http://schemas.microsoft.com/office/drawing/2014/main" id="{B39C52B2-5E9D-9D18-A191-4AACA7BBB5E3}"/>
+            </a:ext>
+          </a:extLst>
+        </p:cNvPr>
+        <p:cNvGrpSpPr/>
+        <p:nvPr/>
+      </p:nvGrpSpPr>
+      <p:grpSpPr>
+        <a:xfrm>
+          <a:off x="0" y="0"/>
+          <a:ext cx="0" cy="0"/>
+          <a:chOff x="0" y="0"/>
+          <a:chExt cx="0" cy="0"/>
+        </a:xfrm>
+      </p:grpSpPr>
+      <p:pic>
+        <p:nvPicPr>
+          <p:cNvPr id="3" name="Imagen 2">
+            <a:extLst>
+              <a:ext uri="{FF2B5EF4-FFF2-40B4-BE49-F238E27FC236}">
+                <a16:creationId xmlns:a16="http://schemas.microsoft.com/office/drawing/2014/main" id="{ADEDF4E6-A15F-CC75-78F4-3E129C8EA5AC}"/>
+              </a:ext>
+            </a:extLst>
+          </p:cNvPr>
+          <p:cNvPicPr>
+            <a:picLocks noChangeAspect="1"/>
+          </p:cNvPicPr>
+          <p:nvPr/>
+        </p:nvPicPr>
+        <p:blipFill>
+          <a:blip r:embed="rId2"/>
+          <a:stretch>
+            <a:fillRect/>
+          </a:stretch>
+        </p:blipFill>
+        <p:spPr>
+          <a:xfrm>
+            <a:off x="1724548" y="676825"/>
+            <a:ext cx="7282292" cy="5488413"/>
+          </a:xfrm>
+          <a:prstGeom prst="rect">
+            <a:avLst/>
+          </a:prstGeom>
+        </p:spPr>
+      </p:pic>
+    </p:spTree>
+    <p:extLst>
+      <p:ext uri="{BB962C8B-B14F-4D97-AF65-F5344CB8AC3E}">
+        <p14:creationId xmlns:p14="http://schemas.microsoft.com/office/powerpoint/2010/main" val="2469411123"/>
       </p:ext>
     </p:extLst>
   </p:cSld>
